--- a/outputs/주제설명_3장.pptx
+++ b/outputs/주제설명_3장.pptx
@@ -3098,14 +3098,14 @@
         </p:nvSpPr>
         <p:spPr>
           <a:xfrm>
-            <a:off x="566928" y="310896"/>
-            <a:ext cx="68580" cy="676656"/>
+            <a:off x="0" y="0"/>
+            <a:ext cx="12191695" cy="6858000"/>
           </a:xfrm>
           <a:prstGeom prst="rect">
             <a:avLst/>
           </a:prstGeom>
           <a:solidFill>
-            <a:srgbClr val="2E75B6"/>
+            <a:srgbClr val="FBFAF6"/>
           </a:solidFill>
           <a:ln>
             <a:noFill/>
@@ -3129,7 +3129,9 @@
         <p:txBody>
           <a:bodyPr rtlCol="0" anchor="ctr"/>
           <a:lstStyle/>
-          <a:p/>
+          <a:p>
+            <a:pPr algn="ctr"/>
+          </a:p>
         </p:txBody>
       </p:sp>
       <p:sp>
@@ -3140,8 +3142,8 @@
         </p:nvSpPr>
         <p:spPr>
           <a:xfrm>
-            <a:off x="786384" y="292608"/>
-            <a:ext cx="457200" cy="457200"/>
+            <a:off x="10436047" y="6345936"/>
+            <a:ext cx="1097280" cy="274320"/>
           </a:xfrm>
           <a:prstGeom prst="rect">
             <a:avLst/>
@@ -3154,21 +3156,21 @@
           </a:bodyPr>
           <a:lstStyle/>
           <a:p>
-            <a:pPr algn="l">
+            <a:pPr algn="r">
               <a:spcAft>
                 <a:spcPts val="0"/>
               </a:spcAft>
             </a:pPr>
             <a:r>
-              <a:rPr sz="2000" b="1">
-                <a:solidFill>
-                  <a:srgbClr val="2E75B6"/>
-                </a:solidFill>
-                <a:latin typeface="Pretendard"/>
-                <a:ea typeface="Pretendard"/>
-                <a:cs typeface="Pretendard"/>
+              <a:rPr sz="1100" b="0">
+                <a:solidFill>
+                  <a:srgbClr val="9C968C"/>
+                </a:solidFill>
+                <a:latin typeface="KoPubBatang Light"/>
+                <a:ea typeface="KoPubBatang Light"/>
+                <a:cs typeface="KoPubBatang Light"/>
               </a:rPr>
-              <a:t>1</a:t>
+              <a:t>1 / 3</a:t>
             </a:r>
           </a:p>
         </p:txBody>
@@ -3181,8 +3183,8 @@
         </p:nvSpPr>
         <p:spPr>
           <a:xfrm>
-            <a:off x="1152144" y="256032"/>
-            <a:ext cx="10472623" cy="640080"/>
+            <a:off x="786384" y="566928"/>
+            <a:ext cx="9923983" cy="1325880"/>
           </a:xfrm>
           <a:prstGeom prst="rect">
             <a:avLst/>
@@ -3197,22 +3199,23 @@
           <a:p>
             <a:pPr algn="l">
               <a:lnSpc>
-                <a:spcPct val="116000"/>
+                <a:spcPct val="120000"/>
               </a:lnSpc>
               <a:spcAft>
                 <a:spcPts val="0"/>
               </a:spcAft>
             </a:pPr>
             <a:r>
-              <a:rPr sz="2900" b="1">
-                <a:solidFill>
-                  <a:srgbClr val="1F4E79"/>
-                </a:solidFill>
-                <a:latin typeface="Pretendard"/>
-                <a:ea typeface="Pretendard"/>
-                <a:cs typeface="Pretendard"/>
+              <a:rPr sz="3800" b="0">
+                <a:solidFill>
+                  <a:srgbClr val="1C1A17"/>
+                </a:solidFill>
+                <a:latin typeface="KoPubBatang Bold"/>
+                <a:ea typeface="KoPubBatang Bold"/>
+                <a:cs typeface="KoPubBatang Bold"/>
               </a:rPr>
-              <a:t>AI CCTV 를 어디에 달아야 하는지, 정해진 기준이 없다</a:t>
+              <a:t>건설현장 AI CCTV를 어디에 달아야 하는지,
+정해 놓은 기준이 없다</a:t>
             </a:r>
           </a:p>
         </p:txBody>
@@ -3225,14 +3228,14 @@
         </p:nvSpPr>
         <p:spPr>
           <a:xfrm>
-            <a:off x="566928" y="1097280"/>
-            <a:ext cx="11057839" cy="16459"/>
+            <a:off x="786384" y="1975104"/>
+            <a:ext cx="10746943" cy="27940"/>
           </a:xfrm>
           <a:prstGeom prst="rect">
             <a:avLst/>
           </a:prstGeom>
           <a:solidFill>
-            <a:srgbClr val="D8DEE5"/>
+            <a:srgbClr val="1C1A17"/>
           </a:solidFill>
           <a:ln>
             <a:noFill/>
@@ -3256,416 +3259,30 @@
         <p:txBody>
           <a:bodyPr rtlCol="0" anchor="ctr"/>
           <a:lstStyle/>
-          <a:p/>
-        </p:txBody>
-      </p:sp>
-      <p:sp>
-        <p:nvSpPr>
-          <p:cNvPr id="6" name="TextBox 5"/>
-          <p:cNvSpPr txBox="1"/>
+          <a:p>
+            <a:pPr algn="ctr"/>
+          </a:p>
+        </p:txBody>
+      </p:sp>
+      <p:sp>
+        <p:nvSpPr>
+          <p:cNvPr id="6" name="Rectangle 5"/>
+          <p:cNvSpPr/>
           <p:nvPr/>
         </p:nvSpPr>
         <p:spPr>
           <a:xfrm>
-            <a:off x="566928" y="1335024"/>
-            <a:ext cx="5358384" cy="420624"/>
+            <a:off x="786384" y="2025396"/>
+            <a:ext cx="10746943" cy="10160"/>
           </a:xfrm>
           <a:prstGeom prst="rect">
             <a:avLst/>
           </a:prstGeom>
-          <a:noFill/>
-        </p:spPr>
-        <p:txBody>
-          <a:bodyPr wrap="square" anchor="t">
-            <a:spAutoFit/>
-          </a:bodyPr>
-          <a:lstStyle/>
-          <a:p>
-            <a:pPr algn="l">
-              <a:spcAft>
-                <a:spcPts val="0"/>
-              </a:spcAft>
-            </a:pPr>
-            <a:r>
-              <a:rPr sz="2000" b="1">
-                <a:solidFill>
-                  <a:srgbClr val="2E75B6"/>
-                </a:solidFill>
-                <a:latin typeface="Pretendard"/>
-                <a:ea typeface="Pretendard"/>
-                <a:cs typeface="Pretendard"/>
-              </a:rPr>
-              <a:t>지금 있는 기준</a:t>
-            </a:r>
-          </a:p>
-        </p:txBody>
-      </p:sp>
-      <p:sp>
-        <p:nvSpPr>
-          <p:cNvPr id="7" name="TextBox 6"/>
-          <p:cNvSpPr txBox="1"/>
-          <p:nvPr/>
-        </p:nvSpPr>
-        <p:spPr>
-          <a:xfrm>
-            <a:off x="6236208" y="1335024"/>
-            <a:ext cx="5358384" cy="420624"/>
-          </a:xfrm>
-          <a:prstGeom prst="rect">
-            <a:avLst/>
-          </a:prstGeom>
-          <a:noFill/>
-        </p:spPr>
-        <p:txBody>
-          <a:bodyPr wrap="square" anchor="t">
-            <a:spAutoFit/>
-          </a:bodyPr>
-          <a:lstStyle/>
-          <a:p>
-            <a:pPr algn="l">
-              <a:spcAft>
-                <a:spcPts val="0"/>
-              </a:spcAft>
-            </a:pPr>
-            <a:r>
-              <a:rPr sz="2000" b="1">
-                <a:solidFill>
-                  <a:srgbClr val="2E75B6"/>
-                </a:solidFill>
-                <a:latin typeface="Pretendard"/>
-                <a:ea typeface="Pretendard"/>
-                <a:cs typeface="Pretendard"/>
-              </a:rPr>
-              <a:t>국제표준은 있지만 사람 눈 기준이다</a:t>
-            </a:r>
-          </a:p>
-        </p:txBody>
-      </p:sp>
-      <p:sp>
-        <p:nvSpPr>
-          <p:cNvPr id="8" name="TextBox 7"/>
-          <p:cNvSpPr txBox="1"/>
-          <p:nvPr/>
-        </p:nvSpPr>
-        <p:spPr>
-          <a:xfrm>
-            <a:off x="566928" y="1792224"/>
-            <a:ext cx="5358384" cy="3108960"/>
-          </a:xfrm>
-          <a:prstGeom prst="rect">
-            <a:avLst/>
-          </a:prstGeom>
-          <a:noFill/>
-        </p:spPr>
-        <p:txBody>
-          <a:bodyPr wrap="square" anchor="t">
-            <a:spAutoFit/>
-          </a:bodyPr>
-          <a:lstStyle/>
-          <a:p>
-            <a:pPr algn="l" marL="274320" indent="-274320">
-              <a:lnSpc>
-                <a:spcPct val="126000"/>
-              </a:lnSpc>
-              <a:spcAft>
-                <a:spcPts val="1500"/>
-              </a:spcAft>
-            </a:pPr>
-            <a:r>
-              <a:rPr sz="1600" b="1">
-                <a:solidFill>
-                  <a:srgbClr val="2D2D2D"/>
-                </a:solidFill>
-                <a:latin typeface="Pretendard"/>
-                <a:ea typeface="Pretendard"/>
-                <a:cs typeface="Pretendard"/>
-              </a:rPr>
-              <a:t>■  </a:t>
-            </a:r>
-            <a:r>
-              <a:rPr sz="1600" b="1">
-                <a:solidFill>
-                  <a:srgbClr val="2D2D2D"/>
-                </a:solidFill>
-                <a:latin typeface="Pretendard"/>
-                <a:ea typeface="Pretendard"/>
-                <a:cs typeface="Pretendard"/>
-              </a:rPr>
-              <a:t>성능 기준은 있다 — </a:t>
-            </a:r>
-            <a:r>
-              <a:rPr sz="1600" b="0">
-                <a:solidFill>
-                  <a:srgbClr val="2D2D2D"/>
-                </a:solidFill>
-                <a:latin typeface="Pretendard"/>
-                <a:ea typeface="Pretendard"/>
-                <a:cs typeface="Pretendard"/>
-              </a:rPr>
-              <a:t>「검출 정확도 90% 이상」. 다만 미리 모아둔 영상으로 잰 값이라 현장 조건은 빠져 있다.</a:t>
-            </a:r>
-          </a:p>
-          <a:p>
-            <a:pPr algn="l" marL="274320" indent="-274320">
-              <a:lnSpc>
-                <a:spcPct val="126000"/>
-              </a:lnSpc>
-              <a:spcAft>
-                <a:spcPts val="1500"/>
-              </a:spcAft>
-            </a:pPr>
-            <a:r>
-              <a:rPr sz="1600" b="1">
-                <a:solidFill>
-                  <a:srgbClr val="2D2D2D"/>
-                </a:solidFill>
-                <a:latin typeface="Pretendard"/>
-                <a:ea typeface="Pretendard"/>
-                <a:cs typeface="Pretendard"/>
-              </a:rPr>
-              <a:t>■  </a:t>
-            </a:r>
-            <a:r>
-              <a:rPr sz="1600" b="1">
-                <a:solidFill>
-                  <a:srgbClr val="2D2D2D"/>
-                </a:solidFill>
-                <a:latin typeface="Pretendard"/>
-                <a:ea typeface="Pretendard"/>
-                <a:cs typeface="Pretendard"/>
-              </a:rPr>
-              <a:t>설치 기준은 없다 — </a:t>
-            </a:r>
-            <a:r>
-              <a:rPr sz="1600" b="0">
-                <a:solidFill>
-                  <a:srgbClr val="2D2D2D"/>
-                </a:solidFill>
-                <a:latin typeface="Pretendard"/>
-                <a:ea typeface="Pretendard"/>
-                <a:cs typeface="Pretendard"/>
-              </a:rPr>
-              <a:t>「설치 위치와 촬영 범위를 적정하게 유지」가 조항의 전부다. 무엇이 적정인지 숫자가 없다.</a:t>
-            </a:r>
-          </a:p>
-          <a:p>
-            <a:pPr algn="l" marL="274320" indent="-274320">
-              <a:lnSpc>
-                <a:spcPct val="126000"/>
-              </a:lnSpc>
-              <a:spcAft>
-                <a:spcPts val="1500"/>
-              </a:spcAft>
-            </a:pPr>
-            <a:r>
-              <a:rPr sz="1600" b="1">
-                <a:solidFill>
-                  <a:srgbClr val="2D2D2D"/>
-                </a:solidFill>
-                <a:latin typeface="Pretendard"/>
-                <a:ea typeface="Pretendard"/>
-                <a:cs typeface="Pretendard"/>
-              </a:rPr>
-              <a:t>■  </a:t>
-            </a:r>
-            <a:r>
-              <a:rPr sz="1600" b="1">
-                <a:solidFill>
-                  <a:srgbClr val="2D2D2D"/>
-                </a:solidFill>
-                <a:latin typeface="Pretendard"/>
-                <a:ea typeface="Pretendard"/>
-                <a:cs typeface="Pretendard"/>
-              </a:rPr>
-              <a:t>이미 지적됐다 — </a:t>
-            </a:r>
-            <a:r>
-              <a:rPr sz="1600" b="0">
-                <a:solidFill>
-                  <a:srgbClr val="2D2D2D"/>
-                </a:solidFill>
-                <a:latin typeface="Pretendard"/>
-                <a:ea typeface="Pretendard"/>
-                <a:cs typeface="Pretendard"/>
-              </a:rPr>
-              <a:t>LH 사용자 평가(2025.12)는 「운용 방식 조정」을 처방했다. 무엇을 조정할지는 적혀 있지 않다.</a:t>
-            </a:r>
-          </a:p>
-        </p:txBody>
-      </p:sp>
-      <p:sp>
-        <p:nvSpPr>
-          <p:cNvPr id="9" name="TextBox 8"/>
-          <p:cNvSpPr txBox="1"/>
-          <p:nvPr/>
-        </p:nvSpPr>
-        <p:spPr>
-          <a:xfrm>
-            <a:off x="6236208" y="1792224"/>
-            <a:ext cx="5358384" cy="3108960"/>
-          </a:xfrm>
-          <a:prstGeom prst="rect">
-            <a:avLst/>
-          </a:prstGeom>
-          <a:noFill/>
-        </p:spPr>
-        <p:txBody>
-          <a:bodyPr wrap="square" anchor="t">
-            <a:spAutoFit/>
-          </a:bodyPr>
-          <a:lstStyle/>
-          <a:p>
-            <a:pPr algn="l" marL="274320" indent="-274320">
-              <a:lnSpc>
-                <a:spcPct val="126000"/>
-              </a:lnSpc>
-              <a:spcAft>
-                <a:spcPts val="1500"/>
-              </a:spcAft>
-            </a:pPr>
-            <a:r>
-              <a:rPr sz="1600" b="1">
-                <a:solidFill>
-                  <a:srgbClr val="2D2D2D"/>
-                </a:solidFill>
-                <a:latin typeface="Pretendard"/>
-                <a:ea typeface="Pretendard"/>
-                <a:cs typeface="Pretendard"/>
-              </a:rPr>
-              <a:t>■  </a:t>
-            </a:r>
-            <a:r>
-              <a:rPr sz="1600" b="1">
-                <a:solidFill>
-                  <a:srgbClr val="2D2D2D"/>
-                </a:solidFill>
-                <a:latin typeface="Pretendard"/>
-                <a:ea typeface="Pretendard"/>
-                <a:cs typeface="Pretendard"/>
-              </a:rPr>
-              <a:t>픽셀 기준이 있다 — </a:t>
-            </a:r>
-            <a:r>
-              <a:rPr sz="1600" b="0">
-                <a:solidFill>
-                  <a:srgbClr val="2D2D2D"/>
-                </a:solidFill>
-                <a:latin typeface="Pretendard"/>
-                <a:ea typeface="Pretendard"/>
-                <a:cs typeface="Pretendard"/>
-              </a:rPr>
-              <a:t>국제표준 IEC 62676-4(DORI). 1 m 를 몇 픽셀로 담아야 하는지 4단계(25·62.5·125·250 픽셀)로 정한다.</a:t>
-            </a:r>
-          </a:p>
-          <a:p>
-            <a:pPr algn="l" marL="274320" indent="-274320">
-              <a:lnSpc>
-                <a:spcPct val="126000"/>
-              </a:lnSpc>
-              <a:spcAft>
-                <a:spcPts val="1500"/>
-              </a:spcAft>
-            </a:pPr>
-            <a:r>
-              <a:rPr sz="1600" b="1">
-                <a:solidFill>
-                  <a:srgbClr val="2D2D2D"/>
-                </a:solidFill>
-                <a:latin typeface="Pretendard"/>
-                <a:ea typeface="Pretendard"/>
-                <a:cs typeface="Pretendard"/>
-              </a:rPr>
-              <a:t>■  </a:t>
-            </a:r>
-            <a:r>
-              <a:rPr sz="1600" b="1">
-                <a:solidFill>
-                  <a:srgbClr val="2D2D2D"/>
-                </a:solidFill>
-                <a:latin typeface="Pretendard"/>
-                <a:ea typeface="Pretendard"/>
-                <a:cs typeface="Pretendard"/>
-              </a:rPr>
-              <a:t>사람에게 물어 만들었다 — </a:t>
-            </a:r>
-            <a:r>
-              <a:rPr sz="1600" b="0">
-                <a:solidFill>
-                  <a:srgbClr val="2D2D2D"/>
-                </a:solidFill>
-                <a:latin typeface="Pretendard"/>
-                <a:ea typeface="Pretendard"/>
-                <a:cs typeface="Pretendard"/>
-              </a:rPr>
-              <a:t>1958년, 사람이 표적을 절반 맞히는 지점을 재서 만든 값이다. AI 가 어디서 못 보는지는 잰 적이 없다.</a:t>
-            </a:r>
-          </a:p>
-          <a:p>
-            <a:pPr algn="l" marL="274320" indent="-274320">
-              <a:lnSpc>
-                <a:spcPct val="126000"/>
-              </a:lnSpc>
-              <a:spcAft>
-                <a:spcPts val="1500"/>
-              </a:spcAft>
-            </a:pPr>
-            <a:r>
-              <a:rPr sz="1600" b="1">
-                <a:solidFill>
-                  <a:srgbClr val="2D2D2D"/>
-                </a:solidFill>
-                <a:latin typeface="Pretendard"/>
-                <a:ea typeface="Pretendard"/>
-                <a:cs typeface="Pretendard"/>
-              </a:rPr>
-              <a:t>■  </a:t>
-            </a:r>
-            <a:r>
-              <a:rPr sz="1600" b="1">
-                <a:solidFill>
-                  <a:srgbClr val="2D2D2D"/>
-                </a:solidFill>
-                <a:latin typeface="Pretendard"/>
-                <a:ea typeface="Pretendard"/>
-                <a:cs typeface="Pretendard"/>
-              </a:rPr>
-              <a:t>거리만 본다 — </a:t>
-            </a:r>
-            <a:r>
-              <a:rPr sz="1600" b="0">
-                <a:solidFill>
-                  <a:srgbClr val="2D2D2D"/>
-                </a:solidFill>
-                <a:latin typeface="Pretendard"/>
-                <a:ea typeface="Pretendard"/>
-                <a:cs typeface="Pretendard"/>
-              </a:rPr>
-              <a:t>내려다보는 각도, 가려진 정도에는 기준이 아예 없다. 합격·불합격 판정이라 카메라를 겹쳐 다는 이득도 셀 수 없다.</a:t>
-            </a:r>
-          </a:p>
-        </p:txBody>
-      </p:sp>
-      <p:sp>
-        <p:nvSpPr>
-          <p:cNvPr id="10" name="Rounded Rectangle 9"/>
-          <p:cNvSpPr/>
-          <p:nvPr/>
-        </p:nvSpPr>
-        <p:spPr>
-          <a:xfrm>
-            <a:off x="566928" y="5138928"/>
-            <a:ext cx="11057839" cy="1115568"/>
-          </a:xfrm>
-          <a:prstGeom prst="roundRect">
-            <a:avLst/>
-          </a:prstGeom>
           <a:solidFill>
-            <a:srgbClr val="F2F7FC"/>
+            <a:srgbClr val="D5CFC2"/>
           </a:solidFill>
-          <a:ln w="17780">
-            <a:solidFill>
-              <a:srgbClr val="2E75B6"/>
-            </a:solidFill>
+          <a:ln>
+            <a:noFill/>
           </a:ln>
           <a:effectLst/>
         </p:spPr>
@@ -3686,19 +3303,21 @@
         <p:txBody>
           <a:bodyPr rtlCol="0" anchor="ctr"/>
           <a:lstStyle/>
-          <a:p/>
-        </p:txBody>
-      </p:sp>
-      <p:sp>
-        <p:nvSpPr>
-          <p:cNvPr id="11" name="TextBox 10"/>
+          <a:p>
+            <a:pPr algn="ctr"/>
+          </a:p>
+        </p:txBody>
+      </p:sp>
+      <p:sp>
+        <p:nvSpPr>
+          <p:cNvPr id="7" name="TextBox 6"/>
           <p:cNvSpPr txBox="1"/>
           <p:nvPr/>
         </p:nvSpPr>
         <p:spPr>
           <a:xfrm>
-            <a:off x="896112" y="5257800"/>
-            <a:ext cx="10399471" cy="987552"/>
+            <a:off x="786384" y="2273300"/>
+            <a:ext cx="9832543" cy="641162"/>
           </a:xfrm>
           <a:prstGeom prst="rect">
             <a:avLst/>
@@ -3713,100 +3332,624 @@
           <a:p>
             <a:pPr algn="l">
               <a:lnSpc>
-                <a:spcPct val="124000"/>
+                <a:spcPct val="146000"/>
               </a:lnSpc>
               <a:spcAft>
-                <a:spcPts val="200"/>
+                <a:spcPts val="0"/>
               </a:spcAft>
             </a:pPr>
             <a:r>
-              <a:rPr sz="1600" b="1">
-                <a:solidFill>
-                  <a:srgbClr val="1F4E79"/>
+              <a:rPr sz="1550" b="0">
+                <a:solidFill>
+                  <a:srgbClr val="34312B"/>
                 </a:solidFill>
                 <a:latin typeface="Pretendard"/>
                 <a:ea typeface="Pretendard"/>
                 <a:cs typeface="Pretendard"/>
               </a:rPr>
-              <a:t>연구 질문</a:t>
-            </a:r>
-          </a:p>
+              <a:t>LH 건설현장에는 AI CCTV가 달려 있다. 카메라가 찍은 화면을 인공지능이 보고, 안전모를 안 쓴 사람을 찾아 관리자에게 알린다. 문제는 그 카메라를 어디에 다느냐에 따라 잘 찾기도 하고 못 찾기도 한다는 것이다.</a:t>
+            </a:r>
+          </a:p>
+        </p:txBody>
+      </p:sp>
+      <p:sp>
+        <p:nvSpPr>
+          <p:cNvPr id="8" name="TextBox 7"/>
+          <p:cNvSpPr txBox="1"/>
+          <p:nvPr/>
+        </p:nvSpPr>
+        <p:spPr>
+          <a:xfrm>
+            <a:off x="786384" y="3115630"/>
+            <a:ext cx="5230368" cy="274320"/>
+          </a:xfrm>
+          <a:prstGeom prst="rect">
+            <a:avLst/>
+          </a:prstGeom>
+          <a:noFill/>
+        </p:spPr>
+        <p:txBody>
+          <a:bodyPr wrap="square" anchor="t">
+            <a:spAutoFit/>
+          </a:bodyPr>
+          <a:lstStyle/>
+          <a:p>
+            <a:pPr algn="l">
+              <a:spcAft>
+                <a:spcPts val="0"/>
+              </a:spcAft>
+            </a:pPr>
+            <a:r>
+              <a:rPr sz="1500" b="0">
+                <a:solidFill>
+                  <a:srgbClr val="1C1A17"/>
+                </a:solidFill>
+                <a:latin typeface="KoPubBatang Bold"/>
+                <a:ea typeface="KoPubBatang Bold"/>
+                <a:cs typeface="KoPubBatang Bold"/>
+              </a:rPr>
+              <a:t>지금 기준이 정한 것과 안 정한 것</a:t>
+            </a:r>
+          </a:p>
+        </p:txBody>
+      </p:sp>
+      <p:sp>
+        <p:nvSpPr>
+          <p:cNvPr id="9" name="TextBox 8"/>
+          <p:cNvSpPr txBox="1"/>
+          <p:nvPr/>
+        </p:nvSpPr>
+        <p:spPr>
+          <a:xfrm>
+            <a:off x="6583680" y="3115630"/>
+            <a:ext cx="4949647" cy="274320"/>
+          </a:xfrm>
+          <a:prstGeom prst="rect">
+            <a:avLst/>
+          </a:prstGeom>
+          <a:noFill/>
+        </p:spPr>
+        <p:txBody>
+          <a:bodyPr wrap="square" anchor="t">
+            <a:spAutoFit/>
+          </a:bodyPr>
+          <a:lstStyle/>
+          <a:p>
+            <a:pPr algn="l">
+              <a:spcAft>
+                <a:spcPts val="0"/>
+              </a:spcAft>
+            </a:pPr>
+            <a:r>
+              <a:rPr sz="1500" b="0">
+                <a:solidFill>
+                  <a:srgbClr val="1C1A17"/>
+                </a:solidFill>
+                <a:latin typeface="KoPubBatang Bold"/>
+                <a:ea typeface="KoPubBatang Bold"/>
+                <a:cs typeface="KoPubBatang Bold"/>
+              </a:rPr>
+              <a:t>이 제안이 새로 하는 것</a:t>
+            </a:r>
+          </a:p>
+        </p:txBody>
+      </p:sp>
+      <p:sp>
+        <p:nvSpPr>
+          <p:cNvPr id="10" name="TextBox 9"/>
+          <p:cNvSpPr txBox="1"/>
+          <p:nvPr/>
+        </p:nvSpPr>
+        <p:spPr>
+          <a:xfrm>
+            <a:off x="786384" y="3481390"/>
+            <a:ext cx="5230368" cy="866302"/>
+          </a:xfrm>
+          <a:prstGeom prst="rect">
+            <a:avLst/>
+          </a:prstGeom>
+          <a:noFill/>
+        </p:spPr>
+        <p:txBody>
+          <a:bodyPr wrap="square" anchor="t">
+            <a:spAutoFit/>
+          </a:bodyPr>
+          <a:lstStyle/>
           <a:p>
             <a:pPr algn="l">
               <a:lnSpc>
-                <a:spcPct val="124000"/>
+                <a:spcPct val="144000"/>
               </a:lnSpc>
               <a:spcAft>
-                <a:spcPts val="200"/>
+                <a:spcPts val="0"/>
               </a:spcAft>
             </a:pPr>
             <a:r>
-              <a:rPr sz="1600" b="1">
-                <a:solidFill>
-                  <a:srgbClr val="1F4E79"/>
+              <a:rPr sz="1450" b="1">
+                <a:solidFill>
+                  <a:srgbClr val="A33B29"/>
                 </a:solidFill>
                 <a:latin typeface="Pretendard"/>
                 <a:ea typeface="Pretendard"/>
                 <a:cs typeface="Pretendard"/>
               </a:rPr>
-              <a:t>①  </a:t>
-            </a:r>
-            <a:r>
-              <a:rPr sz="1600" b="0">
-                <a:solidFill>
-                  <a:srgbClr val="1F4E79"/>
+              <a:t>성능은 인증서로 끝난다  </a:t>
+            </a:r>
+            <a:r>
+              <a:rPr sz="1450" b="0">
+                <a:solidFill>
+                  <a:srgbClr val="34312B"/>
                 </a:solidFill>
                 <a:latin typeface="Pretendard"/>
                 <a:ea typeface="Pretendard"/>
                 <a:cs typeface="Pretendard"/>
               </a:rPr>
-              <a:t>카메라 설치 조건 ― 거리, 내려다보는 각도, 가려진 정도 ― 이 AI 의 안전모 미착용 검출률을 얼마나 바꾸는가?</a:t>
-            </a:r>
-          </a:p>
+              <a:t>인증 시험은 미리 모아둔 영상에서 90% 이상 찾아내면 통과다. 정해진 영상으로만 재니까 카메라를 어디에 달아도 같은 점수가 나온다.</a:t>
+            </a:r>
+          </a:p>
+        </p:txBody>
+      </p:sp>
+      <p:sp>
+        <p:nvSpPr>
+          <p:cNvPr id="11" name="Rectangle 10"/>
+          <p:cNvSpPr/>
+          <p:nvPr/>
+        </p:nvSpPr>
+        <p:spPr>
+          <a:xfrm>
+            <a:off x="786384" y="4457420"/>
+            <a:ext cx="5230368" cy="11430"/>
+          </a:xfrm>
+          <a:prstGeom prst="rect">
+            <a:avLst/>
+          </a:prstGeom>
+          <a:solidFill>
+            <a:srgbClr val="D5CFC2"/>
+          </a:solidFill>
+          <a:ln>
+            <a:noFill/>
+          </a:ln>
+          <a:effectLst/>
+        </p:spPr>
+        <p:style>
+          <a:lnRef idx="1">
+            <a:schemeClr val="accent1"/>
+          </a:lnRef>
+          <a:fillRef idx="3">
+            <a:schemeClr val="accent1"/>
+          </a:fillRef>
+          <a:effectRef idx="2">
+            <a:schemeClr val="accent1"/>
+          </a:effectRef>
+          <a:fontRef idx="minor">
+            <a:schemeClr val="lt1"/>
+          </a:fontRef>
+        </p:style>
+        <p:txBody>
+          <a:bodyPr rtlCol="0" anchor="ctr"/>
+          <a:lstStyle/>
+          <a:p>
+            <a:pPr algn="ctr"/>
+          </a:p>
+        </p:txBody>
+      </p:sp>
+      <p:sp>
+        <p:nvSpPr>
+          <p:cNvPr id="12" name="TextBox 11"/>
+          <p:cNvSpPr txBox="1"/>
+          <p:nvPr/>
+        </p:nvSpPr>
+        <p:spPr>
+          <a:xfrm>
+            <a:off x="786384" y="4548860"/>
+            <a:ext cx="5230368" cy="595823"/>
+          </a:xfrm>
+          <a:prstGeom prst="rect">
+            <a:avLst/>
+          </a:prstGeom>
+          <a:noFill/>
+        </p:spPr>
+        <p:txBody>
+          <a:bodyPr wrap="square" anchor="t">
+            <a:spAutoFit/>
+          </a:bodyPr>
+          <a:lstStyle/>
           <a:p>
             <a:pPr algn="l">
               <a:lnSpc>
-                <a:spcPct val="124000"/>
+                <a:spcPct val="144000"/>
               </a:lnSpc>
               <a:spcAft>
-                <a:spcPts val="200"/>
+                <a:spcPts val="0"/>
               </a:spcAft>
             </a:pPr>
             <a:r>
-              <a:rPr sz="1600" b="1">
-                <a:solidFill>
-                  <a:srgbClr val="1F4E79"/>
+              <a:rPr sz="1450" b="1">
+                <a:solidFill>
+                  <a:srgbClr val="A33B29"/>
                 </a:solidFill>
                 <a:latin typeface="Pretendard"/>
                 <a:ea typeface="Pretendard"/>
                 <a:cs typeface="Pretendard"/>
               </a:rPr>
-              <a:t>②  </a:t>
-            </a:r>
-            <a:r>
-              <a:rPr sz="1600" b="0">
-                <a:solidFill>
-                  <a:srgbClr val="1F4E79"/>
+              <a:t>장비 사양은 있다  </a:t>
+            </a:r>
+            <a:r>
+              <a:rPr sz="1450" b="0">
+                <a:solidFill>
+                  <a:srgbClr val="34312B"/>
                 </a:solidFill>
                 <a:latin typeface="Pretendard"/>
                 <a:ea typeface="Pretendard"/>
                 <a:cs typeface="Pretendard"/>
               </a:rPr>
-              <a:t>그 관계를 알고 배치를 다시 짜면, 카메라를 늘리지 않고 무엇이 나아지는가?</a:t>
-            </a:r>
-          </a:p>
-        </p:txBody>
-      </p:sp>
-      <p:sp>
-        <p:nvSpPr>
-          <p:cNvPr id="12" name="TextBox 11"/>
+              <a:t>AI CCTV 는 200만 화소 이상, 방수·방진 IP56 이상을 권장한다.</a:t>
+            </a:r>
+          </a:p>
+        </p:txBody>
+      </p:sp>
+      <p:sp>
+        <p:nvSpPr>
+          <p:cNvPr id="13" name="Rectangle 12"/>
+          <p:cNvSpPr/>
+          <p:nvPr/>
+        </p:nvSpPr>
+        <p:spPr>
+          <a:xfrm>
+            <a:off x="786384" y="5254411"/>
+            <a:ext cx="5230368" cy="11430"/>
+          </a:xfrm>
+          <a:prstGeom prst="rect">
+            <a:avLst/>
+          </a:prstGeom>
+          <a:solidFill>
+            <a:srgbClr val="D5CFC2"/>
+          </a:solidFill>
+          <a:ln>
+            <a:noFill/>
+          </a:ln>
+          <a:effectLst/>
+        </p:spPr>
+        <p:style>
+          <a:lnRef idx="1">
+            <a:schemeClr val="accent1"/>
+          </a:lnRef>
+          <a:fillRef idx="3">
+            <a:schemeClr val="accent1"/>
+          </a:fillRef>
+          <a:effectRef idx="2">
+            <a:schemeClr val="accent1"/>
+          </a:effectRef>
+          <a:fontRef idx="minor">
+            <a:schemeClr val="lt1"/>
+          </a:fontRef>
+        </p:style>
+        <p:txBody>
+          <a:bodyPr rtlCol="0" anchor="ctr"/>
+          <a:lstStyle/>
+          <a:p>
+            <a:pPr algn="ctr"/>
+          </a:p>
+        </p:txBody>
+      </p:sp>
+      <p:sp>
+        <p:nvSpPr>
+          <p:cNvPr id="14" name="TextBox 13"/>
           <p:cNvSpPr txBox="1"/>
           <p:nvPr/>
         </p:nvSpPr>
         <p:spPr>
           <a:xfrm>
-            <a:off x="566928" y="6345936"/>
-            <a:ext cx="11057839" cy="402336"/>
+            <a:off x="786384" y="5345851"/>
+            <a:ext cx="5230368" cy="595823"/>
+          </a:xfrm>
+          <a:prstGeom prst="rect">
+            <a:avLst/>
+          </a:prstGeom>
+          <a:noFill/>
+        </p:spPr>
+        <p:txBody>
+          <a:bodyPr wrap="square" anchor="t">
+            <a:spAutoFit/>
+          </a:bodyPr>
+          <a:lstStyle/>
+          <a:p>
+            <a:pPr algn="l">
+              <a:lnSpc>
+                <a:spcPct val="144000"/>
+              </a:lnSpc>
+              <a:spcAft>
+                <a:spcPts val="0"/>
+              </a:spcAft>
+            </a:pPr>
+            <a:r>
+              <a:rPr sz="1450" b="1">
+                <a:solidFill>
+                  <a:srgbClr val="A33B29"/>
+                </a:solidFill>
+                <a:latin typeface="Pretendard"/>
+                <a:ea typeface="Pretendard"/>
+                <a:cs typeface="Pretendard"/>
+              </a:rPr>
+              <a:t>설치 조건은 없다  </a:t>
+            </a:r>
+            <a:r>
+              <a:rPr sz="1450" b="0">
+                <a:solidFill>
+                  <a:srgbClr val="34312B"/>
+                </a:solidFill>
+                <a:latin typeface="Pretendard"/>
+                <a:ea typeface="Pretendard"/>
+                <a:cs typeface="Pretendard"/>
+              </a:rPr>
+              <a:t>국토교통부·국토안전관리원 가이드라인과 인증 기준 어디에도 카메라를 얼마나 멀리, 어떤 각도로 달라는 숫자가 없다.</a:t>
+            </a:r>
+          </a:p>
+        </p:txBody>
+      </p:sp>
+      <p:sp>
+        <p:nvSpPr>
+          <p:cNvPr id="15" name="TextBox 14"/>
+          <p:cNvSpPr txBox="1"/>
+          <p:nvPr/>
+        </p:nvSpPr>
+        <p:spPr>
+          <a:xfrm>
+            <a:off x="6583680" y="3481390"/>
+            <a:ext cx="4949647" cy="866302"/>
+          </a:xfrm>
+          <a:prstGeom prst="rect">
+            <a:avLst/>
+          </a:prstGeom>
+          <a:noFill/>
+        </p:spPr>
+        <p:txBody>
+          <a:bodyPr wrap="square" anchor="t">
+            <a:spAutoFit/>
+          </a:bodyPr>
+          <a:lstStyle/>
+          <a:p>
+            <a:pPr algn="l">
+              <a:lnSpc>
+                <a:spcPct val="144000"/>
+              </a:lnSpc>
+              <a:spcAft>
+                <a:spcPts val="0"/>
+              </a:spcAft>
+            </a:pPr>
+            <a:r>
+              <a:rPr sz="1450" b="1">
+                <a:solidFill>
+                  <a:srgbClr val="A33B29"/>
+                </a:solidFill>
+                <a:latin typeface="Pretendard"/>
+                <a:ea typeface="Pretendard"/>
+                <a:cs typeface="Pretendard"/>
+              </a:rPr>
+              <a:t>이미 있는 것  </a:t>
+            </a:r>
+            <a:r>
+              <a:rPr sz="1450" b="0">
+                <a:solidFill>
+                  <a:srgbClr val="34312B"/>
+                </a:solidFill>
+                <a:latin typeface="Pretendard"/>
+                <a:ea typeface="Pretendard"/>
+                <a:cs typeface="Pretendard"/>
+              </a:rPr>
+              <a:t>확률로 카메라 자리를 정하는 방법은 이미 있다. 멀수록·비스듬할수록 못 찾는다는 계산, 여러 대를 합치는 계산까지 모두 기존 연구의 것이다.</a:t>
+            </a:r>
+          </a:p>
+        </p:txBody>
+      </p:sp>
+      <p:sp>
+        <p:nvSpPr>
+          <p:cNvPr id="16" name="Rectangle 15"/>
+          <p:cNvSpPr/>
+          <p:nvPr/>
+        </p:nvSpPr>
+        <p:spPr>
+          <a:xfrm>
+            <a:off x="6583680" y="4457420"/>
+            <a:ext cx="4949647" cy="11430"/>
+          </a:xfrm>
+          <a:prstGeom prst="rect">
+            <a:avLst/>
+          </a:prstGeom>
+          <a:solidFill>
+            <a:srgbClr val="D5CFC2"/>
+          </a:solidFill>
+          <a:ln>
+            <a:noFill/>
+          </a:ln>
+          <a:effectLst/>
+        </p:spPr>
+        <p:style>
+          <a:lnRef idx="1">
+            <a:schemeClr val="accent1"/>
+          </a:lnRef>
+          <a:fillRef idx="3">
+            <a:schemeClr val="accent1"/>
+          </a:fillRef>
+          <a:effectRef idx="2">
+            <a:schemeClr val="accent1"/>
+          </a:effectRef>
+          <a:fontRef idx="minor">
+            <a:schemeClr val="lt1"/>
+          </a:fontRef>
+        </p:style>
+        <p:txBody>
+          <a:bodyPr rtlCol="0" anchor="ctr"/>
+          <a:lstStyle/>
+          <a:p>
+            <a:pPr algn="ctr"/>
+          </a:p>
+        </p:txBody>
+      </p:sp>
+      <p:sp>
+        <p:nvSpPr>
+          <p:cNvPr id="17" name="TextBox 16"/>
+          <p:cNvSpPr txBox="1"/>
+          <p:nvPr/>
+        </p:nvSpPr>
+        <p:spPr>
+          <a:xfrm>
+            <a:off x="6583680" y="4548860"/>
+            <a:ext cx="4949647" cy="866302"/>
+          </a:xfrm>
+          <a:prstGeom prst="rect">
+            <a:avLst/>
+          </a:prstGeom>
+          <a:noFill/>
+        </p:spPr>
+        <p:txBody>
+          <a:bodyPr wrap="square" anchor="t">
+            <a:spAutoFit/>
+          </a:bodyPr>
+          <a:lstStyle/>
+          <a:p>
+            <a:pPr algn="l">
+              <a:lnSpc>
+                <a:spcPct val="144000"/>
+              </a:lnSpc>
+              <a:spcAft>
+                <a:spcPts val="0"/>
+              </a:spcAft>
+            </a:pPr>
+            <a:r>
+              <a:rPr sz="1450" b="1">
+                <a:solidFill>
+                  <a:srgbClr val="A33B29"/>
+                </a:solidFill>
+                <a:latin typeface="Pretendard"/>
+                <a:ea typeface="Pretendard"/>
+                <a:cs typeface="Pretendard"/>
+              </a:rPr>
+              <a:t>우리가 채우는 것  </a:t>
+            </a:r>
+            <a:r>
+              <a:rPr sz="1450" b="0">
+                <a:solidFill>
+                  <a:srgbClr val="34312B"/>
+                </a:solidFill>
+                <a:latin typeface="Pretendard"/>
+                <a:ea typeface="Pretendard"/>
+                <a:cs typeface="Pretendard"/>
+              </a:rPr>
+              <a:t>그 확률을 재보지 않고 식으로 가정했다는 점이다. 직접 찍어서 재고, 가려짐을 0~100% 사이 값으로 다루고, 심사할 때 계산서를 같이 보게 한다.</a:t>
+            </a:r>
+          </a:p>
+        </p:txBody>
+      </p:sp>
+      <p:sp>
+        <p:nvSpPr>
+          <p:cNvPr id="18" name="Rectangle 17"/>
+          <p:cNvSpPr/>
+          <p:nvPr/>
+        </p:nvSpPr>
+        <p:spPr>
+          <a:xfrm>
+            <a:off x="6583680" y="5524891"/>
+            <a:ext cx="4949647" cy="11430"/>
+          </a:xfrm>
+          <a:prstGeom prst="rect">
+            <a:avLst/>
+          </a:prstGeom>
+          <a:solidFill>
+            <a:srgbClr val="D5CFC2"/>
+          </a:solidFill>
+          <a:ln>
+            <a:noFill/>
+          </a:ln>
+          <a:effectLst/>
+        </p:spPr>
+        <p:style>
+          <a:lnRef idx="1">
+            <a:schemeClr val="accent1"/>
+          </a:lnRef>
+          <a:fillRef idx="3">
+            <a:schemeClr val="accent1"/>
+          </a:fillRef>
+          <a:effectRef idx="2">
+            <a:schemeClr val="accent1"/>
+          </a:effectRef>
+          <a:fontRef idx="minor">
+            <a:schemeClr val="lt1"/>
+          </a:fontRef>
+        </p:style>
+        <p:txBody>
+          <a:bodyPr rtlCol="0" anchor="ctr"/>
+          <a:lstStyle/>
+          <a:p>
+            <a:pPr algn="ctr"/>
+          </a:p>
+        </p:txBody>
+      </p:sp>
+      <p:sp>
+        <p:nvSpPr>
+          <p:cNvPr id="19" name="TextBox 18"/>
+          <p:cNvSpPr txBox="1"/>
+          <p:nvPr/>
+        </p:nvSpPr>
+        <p:spPr>
+          <a:xfrm>
+            <a:off x="6583680" y="5616331"/>
+            <a:ext cx="4949647" cy="595823"/>
+          </a:xfrm>
+          <a:prstGeom prst="rect">
+            <a:avLst/>
+          </a:prstGeom>
+          <a:noFill/>
+        </p:spPr>
+        <p:txBody>
+          <a:bodyPr wrap="square" anchor="t">
+            <a:spAutoFit/>
+          </a:bodyPr>
+          <a:lstStyle/>
+          <a:p>
+            <a:pPr algn="l">
+              <a:lnSpc>
+                <a:spcPct val="144000"/>
+              </a:lnSpc>
+              <a:spcAft>
+                <a:spcPts val="0"/>
+              </a:spcAft>
+            </a:pPr>
+            <a:r>
+              <a:rPr sz="1450" b="1">
+                <a:solidFill>
+                  <a:srgbClr val="A33B29"/>
+                </a:solidFill>
+                <a:latin typeface="Pretendard"/>
+                <a:ea typeface="Pretendard"/>
+                <a:cs typeface="Pretendard"/>
+              </a:rPr>
+              <a:t>아직 확인 중  </a:t>
+            </a:r>
+            <a:r>
+              <a:rPr sz="1450" b="0">
+                <a:solidFill>
+                  <a:srgbClr val="34312B"/>
+                </a:solidFill>
+                <a:latin typeface="Pretendard"/>
+                <a:ea typeface="Pretendard"/>
+                <a:cs typeface="Pretendard"/>
+              </a:rPr>
+              <a:t>앞선 연구 3건을 확인 중이다. 1건은 '직접 잰다'를 새롭지 않게 만들 수 있다.</a:t>
+            </a:r>
+          </a:p>
+        </p:txBody>
+      </p:sp>
+      <p:sp>
+        <p:nvSpPr>
+          <p:cNvPr id="20" name="TextBox 19"/>
+          <p:cNvSpPr txBox="1"/>
+          <p:nvPr/>
+        </p:nvSpPr>
+        <p:spPr>
+          <a:xfrm>
+            <a:off x="786384" y="6345936"/>
+            <a:ext cx="9466783" cy="310896"/>
           </a:xfrm>
           <a:prstGeom prst="rect">
             <a:avLst/>
@@ -3828,15 +3971,15 @@
               </a:spcAft>
             </a:pPr>
             <a:r>
-              <a:rPr sz="1300" b="0">
-                <a:solidFill>
-                  <a:srgbClr val="7E7E7E"/>
+              <a:rPr sz="1100" b="0">
+                <a:solidFill>
+                  <a:srgbClr val="9C968C"/>
                 </a:solidFill>
                 <a:latin typeface="Pretendard"/>
                 <a:ea typeface="Pretendard"/>
                 <a:cs typeface="Pretendard"/>
               </a:rPr>
-              <a:t>LH「스마트 안전기술 도입·운용 가이드라인」; LH 스마트건설기술 사용자 평가(2025.12); IEC 62676-4:2014/2025; Johnson (1958)</a:t>
+              <a:t>성능 기준은 KISA 지능형 CCTV 성능 시험인증 · 장비 사양은 국토교통부·국토안전관리원 「스마트 안전장비 가이드라인」(2026.5 개정) · 어느 문서에 무엇이 적혀 있는지는 원문 다시 확인 중</a:t>
             </a:r>
           </a:p>
         </p:txBody>
@@ -3867,14 +4010,14 @@
         </p:nvSpPr>
         <p:spPr>
           <a:xfrm>
-            <a:off x="566928" y="310896"/>
-            <a:ext cx="68580" cy="676656"/>
+            <a:off x="0" y="0"/>
+            <a:ext cx="12191695" cy="6858000"/>
           </a:xfrm>
           <a:prstGeom prst="rect">
             <a:avLst/>
           </a:prstGeom>
           <a:solidFill>
-            <a:srgbClr val="2E75B6"/>
+            <a:srgbClr val="FBFAF6"/>
           </a:solidFill>
           <a:ln>
             <a:noFill/>
@@ -3898,7 +4041,9 @@
         <p:txBody>
           <a:bodyPr rtlCol="0" anchor="ctr"/>
           <a:lstStyle/>
-          <a:p/>
+          <a:p>
+            <a:pPr algn="ctr"/>
+          </a:p>
         </p:txBody>
       </p:sp>
       <p:sp>
@@ -3909,8 +4054,8 @@
         </p:nvSpPr>
         <p:spPr>
           <a:xfrm>
-            <a:off x="786384" y="292608"/>
-            <a:ext cx="457200" cy="457200"/>
+            <a:off x="10436047" y="6345936"/>
+            <a:ext cx="1097280" cy="274320"/>
           </a:xfrm>
           <a:prstGeom prst="rect">
             <a:avLst/>
@@ -3923,21 +4068,21 @@
           </a:bodyPr>
           <a:lstStyle/>
           <a:p>
-            <a:pPr algn="l">
+            <a:pPr algn="r">
               <a:spcAft>
                 <a:spcPts val="0"/>
               </a:spcAft>
             </a:pPr>
             <a:r>
-              <a:rPr sz="2000" b="1">
-                <a:solidFill>
-                  <a:srgbClr val="2E75B6"/>
-                </a:solidFill>
-                <a:latin typeface="Pretendard"/>
-                <a:ea typeface="Pretendard"/>
-                <a:cs typeface="Pretendard"/>
+              <a:rPr sz="1100" b="0">
+                <a:solidFill>
+                  <a:srgbClr val="9C968C"/>
+                </a:solidFill>
+                <a:latin typeface="KoPubBatang Light"/>
+                <a:ea typeface="KoPubBatang Light"/>
+                <a:cs typeface="KoPubBatang Light"/>
               </a:rPr>
-              <a:t>2</a:t>
+              <a:t>2 / 3</a:t>
             </a:r>
           </a:p>
         </p:txBody>
@@ -3950,8 +4095,8 @@
         </p:nvSpPr>
         <p:spPr>
           <a:xfrm>
-            <a:off x="1152144" y="256032"/>
-            <a:ext cx="10472623" cy="640080"/>
+            <a:off x="786384" y="566928"/>
+            <a:ext cx="10746943" cy="640080"/>
           </a:xfrm>
           <a:prstGeom prst="rect">
             <a:avLst/>
@@ -3966,42 +4111,86 @@
           <a:p>
             <a:pPr algn="l">
               <a:lnSpc>
-                <a:spcPct val="116000"/>
+                <a:spcPct val="118000"/>
               </a:lnSpc>
               <a:spcAft>
                 <a:spcPts val="0"/>
               </a:spcAft>
             </a:pPr>
             <a:r>
-              <a:rPr sz="2900" b="1">
-                <a:solidFill>
-                  <a:srgbClr val="1F4E79"/>
+              <a:rPr sz="3200" b="0">
+                <a:solidFill>
+                  <a:srgbClr val="1C1A17"/>
+                </a:solidFill>
+                <a:latin typeface="KoPubBatang Bold"/>
+                <a:ea typeface="KoPubBatang Bold"/>
+                <a:cs typeface="KoPubBatang Bold"/>
+              </a:rPr>
+              <a:t>지금 기준이 정한 것이 셋 중 영향이 가장 작았다</a:t>
+            </a:r>
+          </a:p>
+        </p:txBody>
+      </p:sp>
+      <p:sp>
+        <p:nvSpPr>
+          <p:cNvPr id="5" name="TextBox 4"/>
+          <p:cNvSpPr txBox="1"/>
+          <p:nvPr/>
+        </p:nvSpPr>
+        <p:spPr>
+          <a:xfrm>
+            <a:off x="786384" y="1078992"/>
+            <a:ext cx="9649663" cy="292608"/>
+          </a:xfrm>
+          <a:prstGeom prst="rect">
+            <a:avLst/>
+          </a:prstGeom>
+          <a:noFill/>
+        </p:spPr>
+        <p:txBody>
+          <a:bodyPr wrap="square" anchor="t">
+            <a:spAutoFit/>
+          </a:bodyPr>
+          <a:lstStyle/>
+          <a:p>
+            <a:pPr algn="l">
+              <a:lnSpc>
+                <a:spcPct val="140000"/>
+              </a:lnSpc>
+              <a:spcAft>
+                <a:spcPts val="0"/>
+              </a:spcAft>
+            </a:pPr>
+            <a:r>
+              <a:rPr sz="1450" b="0">
+                <a:solidFill>
+                  <a:srgbClr val="77726A"/>
                 </a:solidFill>
                 <a:latin typeface="Pretendard"/>
                 <a:ea typeface="Pretendard"/>
                 <a:cs typeface="Pretendard"/>
               </a:rPr>
-              <a:t>가장 큰 원인은 거리가 아니라 「가려짐」이었다</a:t>
-            </a:r>
-          </a:p>
-        </p:txBody>
-      </p:sp>
-      <p:sp>
-        <p:nvSpPr>
-          <p:cNvPr id="5" name="Rectangle 4"/>
+              <a:t>셋은 단위가 달라 그대로 견줄 수 없다. 검출률이 90%까지 떨어지는 지점으로 맞춰 비교했다.</a:t>
+            </a:r>
+          </a:p>
+        </p:txBody>
+      </p:sp>
+      <p:sp>
+        <p:nvSpPr>
+          <p:cNvPr id="6" name="Rectangle 5"/>
           <p:cNvSpPr/>
           <p:nvPr/>
         </p:nvSpPr>
         <p:spPr>
           <a:xfrm>
-            <a:off x="566928" y="1097280"/>
-            <a:ext cx="11057839" cy="16459"/>
+            <a:off x="786384" y="1444752"/>
+            <a:ext cx="10746943" cy="11430"/>
           </a:xfrm>
           <a:prstGeom prst="rect">
             <a:avLst/>
           </a:prstGeom>
           <a:solidFill>
-            <a:srgbClr val="D8DEE5"/>
+            <a:srgbClr val="D5CFC2"/>
           </a:solidFill>
           <a:ln>
             <a:noFill/>
@@ -4025,12 +4214,14 @@
         <p:txBody>
           <a:bodyPr rtlCol="0" anchor="ctr"/>
           <a:lstStyle/>
-          <a:p/>
+          <a:p>
+            <a:pPr algn="ctr"/>
+          </a:p>
         </p:txBody>
       </p:sp>
       <p:pic>
         <p:nvPicPr>
-          <p:cNvPr id="6" name="Picture 5" descr="fig_curves.png"/>
+          <p:cNvPr id="7" name="Picture 6" descr="fig_curves.png"/>
           <p:cNvPicPr>
             <a:picLocks noChangeAspect="1"/>
           </p:cNvPicPr>
@@ -4044,8 +4235,8 @@
         </p:blipFill>
         <p:spPr>
           <a:xfrm>
-            <a:off x="1432407" y="1207007"/>
-            <a:ext cx="9326880" cy="3010039"/>
+            <a:off x="731520" y="1572768"/>
+            <a:ext cx="10424160" cy="2788920"/>
           </a:xfrm>
           <a:prstGeom prst="rect">
             <a:avLst/>
@@ -4054,25 +4245,157 @@
       </p:pic>
       <p:sp>
         <p:nvSpPr>
-          <p:cNvPr id="7" name="Rounded Rectangle 6"/>
+          <p:cNvPr id="8" name="TextBox 7"/>
+          <p:cNvSpPr txBox="1"/>
+          <p:nvPr/>
+        </p:nvSpPr>
+        <p:spPr>
+          <a:xfrm>
+            <a:off x="786384" y="4562856"/>
+            <a:ext cx="3307994" cy="256032"/>
+          </a:xfrm>
+          <a:prstGeom prst="rect">
+            <a:avLst/>
+          </a:prstGeom>
+          <a:noFill/>
+        </p:spPr>
+        <p:txBody>
+          <a:bodyPr wrap="square" anchor="t">
+            <a:spAutoFit/>
+          </a:bodyPr>
+          <a:lstStyle/>
+          <a:p>
+            <a:pPr algn="l">
+              <a:spcAft>
+                <a:spcPts val="0"/>
+              </a:spcAft>
+            </a:pPr>
+            <a:r>
+              <a:rPr sz="1150" b="0">
+                <a:solidFill>
+                  <a:srgbClr val="77726A"/>
+                </a:solidFill>
+                <a:latin typeface="Pretendard"/>
+                <a:ea typeface="Pretendard"/>
+                <a:cs typeface="Pretendard"/>
+              </a:rPr>
+              <a:t>카메라와의 거리</a:t>
+            </a:r>
+          </a:p>
+        </p:txBody>
+      </p:sp>
+      <p:sp>
+        <p:nvSpPr>
+          <p:cNvPr id="9" name="TextBox 8"/>
+          <p:cNvSpPr txBox="1"/>
+          <p:nvPr/>
+        </p:nvSpPr>
+        <p:spPr>
+          <a:xfrm>
+            <a:off x="786384" y="4818888"/>
+            <a:ext cx="3307994" cy="512064"/>
+          </a:xfrm>
+          <a:prstGeom prst="rect">
+            <a:avLst/>
+          </a:prstGeom>
+          <a:noFill/>
+        </p:spPr>
+        <p:txBody>
+          <a:bodyPr wrap="square" anchor="t">
+            <a:spAutoFit/>
+          </a:bodyPr>
+          <a:lstStyle/>
+          <a:p>
+            <a:pPr algn="l">
+              <a:spcAft>
+                <a:spcPts val="0"/>
+              </a:spcAft>
+            </a:pPr>
+            <a:r>
+              <a:rPr sz="3000" b="0">
+                <a:solidFill>
+                  <a:srgbClr val="1C1A17"/>
+                </a:solidFill>
+                <a:latin typeface="KoPubBatang Bold"/>
+                <a:ea typeface="KoPubBatang Bold"/>
+                <a:cs typeface="KoPubBatang Bold"/>
+              </a:rPr>
+              <a:t>55</a:t>
+            </a:r>
+            <a:r>
+              <a:rPr sz="1700" b="0">
+                <a:solidFill>
+                  <a:srgbClr val="1C1A17"/>
+                </a:solidFill>
+                <a:latin typeface="KoPubBatang Medium"/>
+                <a:ea typeface="KoPubBatang Medium"/>
+                <a:cs typeface="KoPubBatang Medium"/>
+              </a:rPr>
+              <a:t> m</a:t>
+            </a:r>
+          </a:p>
+        </p:txBody>
+      </p:sp>
+      <p:sp>
+        <p:nvSpPr>
+          <p:cNvPr id="10" name="TextBox 9"/>
+          <p:cNvSpPr txBox="1"/>
+          <p:nvPr/>
+        </p:nvSpPr>
+        <p:spPr>
+          <a:xfrm>
+            <a:off x="786384" y="5330952"/>
+            <a:ext cx="3307994" cy="274320"/>
+          </a:xfrm>
+          <a:prstGeom prst="rect">
+            <a:avLst/>
+          </a:prstGeom>
+          <a:noFill/>
+        </p:spPr>
+        <p:txBody>
+          <a:bodyPr wrap="square" anchor="t">
+            <a:spAutoFit/>
+          </a:bodyPr>
+          <a:lstStyle/>
+          <a:p>
+            <a:pPr algn="l">
+              <a:spcAft>
+                <a:spcPts val="0"/>
+              </a:spcAft>
+            </a:pPr>
+            <a:r>
+              <a:rPr sz="1200" b="0">
+                <a:solidFill>
+                  <a:srgbClr val="77726A"/>
+                </a:solidFill>
+                <a:latin typeface="Pretendard"/>
+                <a:ea typeface="Pretendard"/>
+                <a:cs typeface="Pretendard"/>
+              </a:rPr>
+              <a:t>40 m에서는 아직 94%다</a:t>
+            </a:r>
+          </a:p>
+        </p:txBody>
+      </p:sp>
+      <p:sp>
+        <p:nvSpPr>
+          <p:cNvPr id="11" name="Rectangle 10"/>
           <p:cNvSpPr/>
           <p:nvPr/>
         </p:nvSpPr>
         <p:spPr>
           <a:xfrm>
-            <a:off x="566928" y="4345062"/>
-            <a:ext cx="3466490" cy="969264"/>
-          </a:xfrm>
-          <a:prstGeom prst="roundRect">
+            <a:off x="4286402" y="4599432"/>
+            <a:ext cx="11430" cy="932688"/>
+          </a:xfrm>
+          <a:prstGeom prst="rect">
             <a:avLst/>
           </a:prstGeom>
           <a:solidFill>
-            <a:srgbClr val="F2F7FC"/>
+            <a:srgbClr val="D5CFC2"/>
           </a:solidFill>
-          <a:ln w="13970">
-            <a:solidFill>
-              <a:srgbClr val="2E75B6"/>
-            </a:solidFill>
+          <a:ln>
+            <a:noFill/>
           </a:ln>
           <a:effectLst/>
         </p:spPr>
@@ -4093,19 +4416,21 @@
         <p:txBody>
           <a:bodyPr rtlCol="0" anchor="ctr"/>
           <a:lstStyle/>
-          <a:p/>
-        </p:txBody>
-      </p:sp>
-      <p:sp>
-        <p:nvSpPr>
-          <p:cNvPr id="8" name="TextBox 7"/>
+          <a:p>
+            <a:pPr algn="ctr"/>
+          </a:p>
+        </p:txBody>
+      </p:sp>
+      <p:sp>
+        <p:nvSpPr>
+          <p:cNvPr id="12" name="TextBox 11"/>
           <p:cNvSpPr txBox="1"/>
           <p:nvPr/>
         </p:nvSpPr>
         <p:spPr>
           <a:xfrm>
-            <a:off x="786384" y="4436502"/>
-            <a:ext cx="3027578" cy="292608"/>
+            <a:off x="4505858" y="4562856"/>
+            <a:ext cx="3307994" cy="256032"/>
           </a:xfrm>
           <a:prstGeom prst="rect">
             <a:avLst/>
@@ -4124,29 +4449,29 @@
               </a:spcAft>
             </a:pPr>
             <a:r>
-              <a:rPr sz="1300" b="0">
-                <a:solidFill>
-                  <a:srgbClr val="7E7E7E"/>
+              <a:rPr sz="1150" b="0">
+                <a:solidFill>
+                  <a:srgbClr val="77726A"/>
                 </a:solidFill>
                 <a:latin typeface="Pretendard"/>
                 <a:ea typeface="Pretendard"/>
                 <a:cs typeface="Pretendard"/>
               </a:rPr>
-              <a:t>카메라와의 거리</a:t>
-            </a:r>
-          </a:p>
-        </p:txBody>
-      </p:sp>
-      <p:sp>
-        <p:nvSpPr>
-          <p:cNvPr id="9" name="TextBox 8"/>
+              <a:t>내려다보는 각도</a:t>
+            </a:r>
+          </a:p>
+        </p:txBody>
+      </p:sp>
+      <p:sp>
+        <p:nvSpPr>
+          <p:cNvPr id="13" name="TextBox 12"/>
           <p:cNvSpPr txBox="1"/>
           <p:nvPr/>
         </p:nvSpPr>
         <p:spPr>
           <a:xfrm>
-            <a:off x="786384" y="4692534"/>
-            <a:ext cx="3027578" cy="365760"/>
+            <a:off x="4505858" y="4818888"/>
+            <a:ext cx="3307994" cy="512064"/>
           </a:xfrm>
           <a:prstGeom prst="rect">
             <a:avLst/>
@@ -4165,29 +4490,40 @@
               </a:spcAft>
             </a:pPr>
             <a:r>
-              <a:rPr sz="1800" b="1">
-                <a:solidFill>
-                  <a:srgbClr val="1F4E79"/>
-                </a:solidFill>
-                <a:latin typeface="Pretendard"/>
-                <a:ea typeface="Pretendard"/>
-                <a:cs typeface="Pretendard"/>
+              <a:rPr sz="3000" b="0">
+                <a:solidFill>
+                  <a:srgbClr val="1C1A17"/>
+                </a:solidFill>
+                <a:latin typeface="KoPubBatang Bold"/>
+                <a:ea typeface="KoPubBatang Bold"/>
+                <a:cs typeface="KoPubBatang Bold"/>
               </a:rPr>
-              <a:t>60 m 넘으면 떨어진다</a:t>
-            </a:r>
-          </a:p>
-        </p:txBody>
-      </p:sp>
-      <p:sp>
-        <p:nvSpPr>
-          <p:cNvPr id="10" name="TextBox 9"/>
+              <a:t>52</a:t>
+            </a:r>
+            <a:r>
+              <a:rPr sz="1700" b="0">
+                <a:solidFill>
+                  <a:srgbClr val="1C1A17"/>
+                </a:solidFill>
+                <a:latin typeface="KoPubBatang Medium"/>
+                <a:ea typeface="KoPubBatang Medium"/>
+                <a:cs typeface="KoPubBatang Medium"/>
+              </a:rPr>
+              <a:t>°</a:t>
+            </a:r>
+          </a:p>
+        </p:txBody>
+      </p:sp>
+      <p:sp>
+        <p:nvSpPr>
+          <p:cNvPr id="14" name="TextBox 13"/>
           <p:cNvSpPr txBox="1"/>
           <p:nvPr/>
         </p:nvSpPr>
         <p:spPr>
           <a:xfrm>
-            <a:off x="786384" y="5012574"/>
-            <a:ext cx="3027578" cy="274320"/>
+            <a:off x="4505858" y="5330952"/>
+            <a:ext cx="3307994" cy="274320"/>
           </a:xfrm>
           <a:prstGeom prst="rect">
             <a:avLst/>
@@ -4206,40 +4542,38 @@
               </a:spcAft>
             </a:pPr>
             <a:r>
-              <a:rPr sz="1300" b="0">
-                <a:solidFill>
-                  <a:srgbClr val="7E7E7E"/>
+              <a:rPr sz="1200" b="0">
+                <a:solidFill>
+                  <a:srgbClr val="77726A"/>
                 </a:solidFill>
                 <a:latin typeface="Pretendard"/>
                 <a:ea typeface="Pretendard"/>
                 <a:cs typeface="Pretendard"/>
               </a:rPr>
-              <a:t>40 m 까지는 94% 를 유지</a:t>
-            </a:r>
-          </a:p>
-        </p:txBody>
-      </p:sp>
-      <p:sp>
-        <p:nvSpPr>
-          <p:cNvPr id="11" name="Rounded Rectangle 10"/>
+              <a:t>45°에서는 98%로 거의 그대로다</a:t>
+            </a:r>
+          </a:p>
+        </p:txBody>
+      </p:sp>
+      <p:sp>
+        <p:nvSpPr>
+          <p:cNvPr id="15" name="Rectangle 14"/>
           <p:cNvSpPr/>
           <p:nvPr/>
         </p:nvSpPr>
         <p:spPr>
           <a:xfrm>
-            <a:off x="4362602" y="4345062"/>
-            <a:ext cx="3466490" cy="969264"/>
-          </a:xfrm>
-          <a:prstGeom prst="roundRect">
+            <a:off x="8005876" y="4599432"/>
+            <a:ext cx="11430" cy="932688"/>
+          </a:xfrm>
+          <a:prstGeom prst="rect">
             <a:avLst/>
           </a:prstGeom>
           <a:solidFill>
-            <a:srgbClr val="F2F7FC"/>
+            <a:srgbClr val="D5CFC2"/>
           </a:solidFill>
-          <a:ln w="13970">
-            <a:solidFill>
-              <a:srgbClr val="2E75B6"/>
-            </a:solidFill>
+          <a:ln>
+            <a:noFill/>
           </a:ln>
           <a:effectLst/>
         </p:spPr>
@@ -4260,19 +4594,21 @@
         <p:txBody>
           <a:bodyPr rtlCol="0" anchor="ctr"/>
           <a:lstStyle/>
-          <a:p/>
-        </p:txBody>
-      </p:sp>
-      <p:sp>
-        <p:nvSpPr>
-          <p:cNvPr id="12" name="TextBox 11"/>
+          <a:p>
+            <a:pPr algn="ctr"/>
+          </a:p>
+        </p:txBody>
+      </p:sp>
+      <p:sp>
+        <p:nvSpPr>
+          <p:cNvPr id="16" name="TextBox 15"/>
           <p:cNvSpPr txBox="1"/>
           <p:nvPr/>
         </p:nvSpPr>
         <p:spPr>
           <a:xfrm>
-            <a:off x="4582058" y="4436502"/>
-            <a:ext cx="3027578" cy="292608"/>
+            <a:off x="8225332" y="4562856"/>
+            <a:ext cx="3307994" cy="256032"/>
           </a:xfrm>
           <a:prstGeom prst="rect">
             <a:avLst/>
@@ -4291,29 +4627,29 @@
               </a:spcAft>
             </a:pPr>
             <a:r>
-              <a:rPr sz="1300" b="0">
-                <a:solidFill>
-                  <a:srgbClr val="7E7E7E"/>
+              <a:rPr sz="1150" b="0">
+                <a:solidFill>
+                  <a:srgbClr val="A33B29"/>
                 </a:solidFill>
                 <a:latin typeface="Pretendard"/>
                 <a:ea typeface="Pretendard"/>
                 <a:cs typeface="Pretendard"/>
               </a:rPr>
-              <a:t>내려다보는 각도</a:t>
-            </a:r>
-          </a:p>
-        </p:txBody>
-      </p:sp>
-      <p:sp>
-        <p:nvSpPr>
-          <p:cNvPr id="13" name="TextBox 12"/>
+              <a:t>가려진 정도</a:t>
+            </a:r>
+          </a:p>
+        </p:txBody>
+      </p:sp>
+      <p:sp>
+        <p:nvSpPr>
+          <p:cNvPr id="17" name="TextBox 16"/>
           <p:cNvSpPr txBox="1"/>
           <p:nvPr/>
         </p:nvSpPr>
         <p:spPr>
           <a:xfrm>
-            <a:off x="4582058" y="4692534"/>
-            <a:ext cx="3027578" cy="365760"/>
+            <a:off x="8225332" y="4818888"/>
+            <a:ext cx="3307994" cy="512064"/>
           </a:xfrm>
           <a:prstGeom prst="rect">
             <a:avLst/>
@@ -4332,29 +4668,40 @@
               </a:spcAft>
             </a:pPr>
             <a:r>
-              <a:rPr sz="1800" b="1">
-                <a:solidFill>
-                  <a:srgbClr val="1F4E79"/>
-                </a:solidFill>
-                <a:latin typeface="Pretendard"/>
-                <a:ea typeface="Pretendard"/>
-                <a:cs typeface="Pretendard"/>
+              <a:rPr sz="3000" b="0">
+                <a:solidFill>
+                  <a:srgbClr val="A33B29"/>
+                </a:solidFill>
+                <a:latin typeface="KoPubBatang Bold"/>
+                <a:ea typeface="KoPubBatang Bold"/>
+                <a:cs typeface="KoPubBatang Bold"/>
               </a:rPr>
-              <a:t>61° 에서 무너진다</a:t>
-            </a:r>
-          </a:p>
-        </p:txBody>
-      </p:sp>
-      <p:sp>
-        <p:nvSpPr>
-          <p:cNvPr id="14" name="TextBox 13"/>
+              <a:t>2.5</a:t>
+            </a:r>
+            <a:r>
+              <a:rPr sz="1700" b="0">
+                <a:solidFill>
+                  <a:srgbClr val="A33B29"/>
+                </a:solidFill>
+                <a:latin typeface="KoPubBatang Medium"/>
+                <a:ea typeface="KoPubBatang Medium"/>
+                <a:cs typeface="KoPubBatang Medium"/>
+              </a:rPr>
+              <a:t>%</a:t>
+            </a:r>
+          </a:p>
+        </p:txBody>
+      </p:sp>
+      <p:sp>
+        <p:nvSpPr>
+          <p:cNvPr id="18" name="TextBox 17"/>
           <p:cNvSpPr txBox="1"/>
           <p:nvPr/>
         </p:nvSpPr>
         <p:spPr>
           <a:xfrm>
-            <a:off x="4582058" y="5012574"/>
-            <a:ext cx="3027578" cy="274320"/>
+            <a:off x="8225332" y="5330952"/>
+            <a:ext cx="3307994" cy="274320"/>
           </a:xfrm>
           <a:prstGeom prst="rect">
             <a:avLst/>
@@ -4373,40 +4720,38 @@
               </a:spcAft>
             </a:pPr>
             <a:r>
-              <a:rPr sz="1300" b="0">
-                <a:solidFill>
-                  <a:srgbClr val="7E7E7E"/>
+              <a:rPr sz="1200" b="0">
+                <a:solidFill>
+                  <a:srgbClr val="77726A"/>
                 </a:solidFill>
                 <a:latin typeface="Pretendard"/>
                 <a:ea typeface="Pretendard"/>
                 <a:cs typeface="Pretendard"/>
               </a:rPr>
-              <a:t>45° 까지는 거의 영향 없음</a:t>
-            </a:r>
-          </a:p>
-        </p:txBody>
-      </p:sp>
-      <p:sp>
-        <p:nvSpPr>
-          <p:cNvPr id="15" name="Rounded Rectangle 14"/>
+              <a:t>실제로 재본 15%에서는 이미 72%다</a:t>
+            </a:r>
+          </a:p>
+        </p:txBody>
+      </p:sp>
+      <p:sp>
+        <p:nvSpPr>
+          <p:cNvPr id="19" name="Rectangle 18"/>
           <p:cNvSpPr/>
           <p:nvPr/>
         </p:nvSpPr>
         <p:spPr>
           <a:xfrm>
-            <a:off x="8158276" y="4345062"/>
-            <a:ext cx="3466490" cy="969264"/>
-          </a:xfrm>
-          <a:prstGeom prst="roundRect">
+            <a:off x="786384" y="5696712"/>
+            <a:ext cx="10746943" cy="11430"/>
+          </a:xfrm>
+          <a:prstGeom prst="rect">
             <a:avLst/>
           </a:prstGeom>
           <a:solidFill>
-            <a:srgbClr val="FDF3F3"/>
+            <a:srgbClr val="D5CFC2"/>
           </a:solidFill>
-          <a:ln w="20320">
-            <a:solidFill>
-              <a:srgbClr val="C00000"/>
-            </a:solidFill>
+          <a:ln>
+            <a:noFill/>
           </a:ln>
           <a:effectLst/>
         </p:spPr>
@@ -4427,19 +4772,21 @@
         <p:txBody>
           <a:bodyPr rtlCol="0" anchor="ctr"/>
           <a:lstStyle/>
-          <a:p/>
-        </p:txBody>
-      </p:sp>
-      <p:sp>
-        <p:nvSpPr>
-          <p:cNvPr id="16" name="TextBox 15"/>
+          <a:p>
+            <a:pPr algn="ctr"/>
+          </a:p>
+        </p:txBody>
+      </p:sp>
+      <p:sp>
+        <p:nvSpPr>
+          <p:cNvPr id="20" name="TextBox 19"/>
           <p:cNvSpPr txBox="1"/>
           <p:nvPr/>
         </p:nvSpPr>
         <p:spPr>
           <a:xfrm>
-            <a:off x="8377732" y="4436502"/>
-            <a:ext cx="3027578" cy="292608"/>
+            <a:off x="786384" y="5833872"/>
+            <a:ext cx="10472623" cy="603504"/>
           </a:xfrm>
           <a:prstGeom prst="rect">
             <a:avLst/>
@@ -4453,171 +4800,48 @@
           <a:lstStyle/>
           <a:p>
             <a:pPr algn="l">
-              <a:spcAft>
-                <a:spcPts val="0"/>
-              </a:spcAft>
-            </a:pPr>
-            <a:r>
-              <a:rPr sz="1300" b="0">
-                <a:solidFill>
-                  <a:srgbClr val="C00000"/>
-                </a:solidFill>
-                <a:latin typeface="Pretendard"/>
-                <a:ea typeface="Pretendard"/>
-                <a:cs typeface="Pretendard"/>
-              </a:rPr>
-              <a:t>가려진 정도</a:t>
-            </a:r>
-          </a:p>
-        </p:txBody>
-      </p:sp>
-      <p:sp>
-        <p:nvSpPr>
-          <p:cNvPr id="17" name="TextBox 16"/>
-          <p:cNvSpPr txBox="1"/>
-          <p:nvPr/>
-        </p:nvSpPr>
-        <p:spPr>
-          <a:xfrm>
-            <a:off x="8377732" y="4692534"/>
-            <a:ext cx="3027578" cy="365760"/>
-          </a:xfrm>
-          <a:prstGeom prst="rect">
-            <a:avLst/>
-          </a:prstGeom>
-          <a:noFill/>
-        </p:spPr>
-        <p:txBody>
-          <a:bodyPr wrap="square" anchor="t">
-            <a:spAutoFit/>
-          </a:bodyPr>
-          <a:lstStyle/>
-          <a:p>
-            <a:pPr algn="l">
-              <a:spcAft>
-                <a:spcPts val="0"/>
-              </a:spcAft>
-            </a:pPr>
-            <a:r>
-              <a:rPr sz="1800" b="1">
-                <a:solidFill>
-                  <a:srgbClr val="C00000"/>
-                </a:solidFill>
-                <a:latin typeface="Pretendard"/>
-                <a:ea typeface="Pretendard"/>
-                <a:cs typeface="Pretendard"/>
-              </a:rPr>
-              <a:t>15% 만 가려도 72%</a:t>
-            </a:r>
-          </a:p>
-        </p:txBody>
-      </p:sp>
-      <p:sp>
-        <p:nvSpPr>
-          <p:cNvPr id="18" name="TextBox 17"/>
-          <p:cNvSpPr txBox="1"/>
-          <p:nvPr/>
-        </p:nvSpPr>
-        <p:spPr>
-          <a:xfrm>
-            <a:off x="8377732" y="5012574"/>
-            <a:ext cx="3027578" cy="274320"/>
-          </a:xfrm>
-          <a:prstGeom prst="rect">
-            <a:avLst/>
-          </a:prstGeom>
-          <a:noFill/>
-        </p:spPr>
-        <p:txBody>
-          <a:bodyPr wrap="square" anchor="t">
-            <a:spAutoFit/>
-          </a:bodyPr>
-          <a:lstStyle/>
-          <a:p>
-            <a:pPr algn="l">
-              <a:spcAft>
-                <a:spcPts val="0"/>
-              </a:spcAft>
-            </a:pPr>
-            <a:r>
-              <a:rPr sz="1300" b="0">
-                <a:solidFill>
-                  <a:srgbClr val="7E7E7E"/>
-                </a:solidFill>
-                <a:latin typeface="Pretendard"/>
-                <a:ea typeface="Pretendard"/>
-                <a:cs typeface="Pretendard"/>
-              </a:rPr>
-              <a:t>셋 중 가장 치명적</a:t>
-            </a:r>
-          </a:p>
-        </p:txBody>
-      </p:sp>
-      <p:sp>
-        <p:nvSpPr>
-          <p:cNvPr id="19" name="TextBox 18"/>
-          <p:cNvSpPr txBox="1"/>
-          <p:nvPr/>
-        </p:nvSpPr>
-        <p:spPr>
-          <a:xfrm>
-            <a:off x="566928" y="5442342"/>
-            <a:ext cx="11057839" cy="713232"/>
-          </a:xfrm>
-          <a:prstGeom prst="rect">
-            <a:avLst/>
-          </a:prstGeom>
-          <a:noFill/>
-        </p:spPr>
-        <p:txBody>
-          <a:bodyPr wrap="square" anchor="t">
-            <a:spAutoFit/>
-          </a:bodyPr>
-          <a:lstStyle/>
-          <a:p>
-            <a:pPr algn="l" marL="841248" indent="-841248">
               <a:lnSpc>
-                <a:spcPct val="134000"/>
+                <a:spcPct val="148000"/>
               </a:lnSpc>
               <a:spcAft>
                 <a:spcPts val="0"/>
               </a:spcAft>
             </a:pPr>
             <a:r>
-              <a:rPr sz="1300" b="1">
-                <a:solidFill>
-                  <a:srgbClr val="2D2D2D"/>
+              <a:rPr sz="1200" b="1">
+                <a:solidFill>
+                  <a:srgbClr val="1C1A17"/>
                 </a:solidFill>
                 <a:latin typeface="Pretendard"/>
                 <a:ea typeface="Pretendard"/>
                 <a:cs typeface="Pretendard"/>
               </a:rPr>
-              <a:t>어떻게 쟀나 — </a:t>
-            </a:r>
-            <a:r>
-              <a:rPr sz="1300" b="0">
-                <a:solidFill>
-                  <a:srgbClr val="2D2D2D"/>
+              <a:t>어느 게 나쁘냐가 아니라 얼마나 나쁘냐  </a:t>
+            </a:r>
+            <a:r>
+              <a:rPr sz="1200" b="0">
+                <a:solidFill>
+                  <a:srgbClr val="34312B"/>
                 </a:solidFill>
                 <a:latin typeface="Pretendard"/>
                 <a:ea typeface="Pretendard"/>
                 <a:cs typeface="Pretendard"/>
               </a:rPr>
-              <a:t>안전모 사진 500장을 흐리게(거리) · 기울여(각도) · 세로줄로 가려(가려짐) 총 288가지 상태로 변형하고, 상태마다 AI 가 안전모 미착용을 몇 % 찾아내는지 셌다. 세 조건의 영향을 각각 구해 곱하는 식으로 정리했고, 288개 실측값을 89.8% 설명한다. 재보지 않은 범위는 추측하지 않고 0 으로 둔다.</a:t>
-            </a:r>
-          </a:p>
-        </p:txBody>
-      </p:sp>
-      <p:sp>
-        <p:nvSpPr>
-          <p:cNvPr id="20" name="TextBox 19"/>
+              <a:t>가려지면 잘 못 찾는다는 건 다 아는 이야기다. 여기서 한 일은 그게 얼마나 나쁜지를 288가지 조건에서 직접 재어, 배치 계산에 넣을 수 있는 식으로 만든 것이다. 기존 연구는 가림을 막혔다·안 막혔다 둘 중 하나로만 다룬다. 위 세 값은 식으로 계산한 지점이고, 실제로 재본 가림은 15%부터다.</a:t>
+            </a:r>
+          </a:p>
+        </p:txBody>
+      </p:sp>
+      <p:sp>
+        <p:nvSpPr>
+          <p:cNvPr id="21" name="TextBox 20"/>
           <p:cNvSpPr txBox="1"/>
           <p:nvPr/>
         </p:nvSpPr>
         <p:spPr>
           <a:xfrm>
-            <a:off x="566928" y="6345936"/>
-            <a:ext cx="11057839" cy="402336"/>
+            <a:off x="786384" y="6345936"/>
+            <a:ext cx="9466783" cy="310896"/>
           </a:xfrm>
           <a:prstGeom prst="rect">
             <a:avLst/>
@@ -4639,15 +4863,15 @@
               </a:spcAft>
             </a:pPr>
             <a:r>
-              <a:rPr sz="1300" b="0">
-                <a:solidFill>
-                  <a:srgbClr val="7E7E7E"/>
+              <a:rPr sz="1100" b="0">
+                <a:solidFill>
+                  <a:srgbClr val="9C968C"/>
                 </a:solidFill>
                 <a:latin typeface="Pretendard"/>
                 <a:ea typeface="Pretendard"/>
                 <a:cs typeface="Pretendard"/>
               </a:rPr>
-              <a:t>세로축은 조건을 걸지 않았을 때(93.7%) 대비 비율 · 점은 실측값, 선은 정리한 식 · 검출기는 안전모 사진으로 추가 학습시킨 YOLOv8n</a:t>
+              <a:t>안전모 사진 500장 · 세로축은 아무 조건도 안 걸었을 때(93.7%)를 1로 둔 비율 · 세 조건을 곱해 쓰는 식, 설명력 0.898 · 검출기는 안전모 사진으로 추가 학습시킨 YOLOv8n · 거리는 4K 해상도, 화각 90° 기준</a:t>
             </a:r>
           </a:p>
         </p:txBody>
@@ -4678,14 +4902,14 @@
         </p:nvSpPr>
         <p:spPr>
           <a:xfrm>
-            <a:off x="566928" y="310896"/>
-            <a:ext cx="68580" cy="676656"/>
+            <a:off x="0" y="0"/>
+            <a:ext cx="12191695" cy="6858000"/>
           </a:xfrm>
           <a:prstGeom prst="rect">
             <a:avLst/>
           </a:prstGeom>
           <a:solidFill>
-            <a:srgbClr val="2E75B6"/>
+            <a:srgbClr val="FBFAF6"/>
           </a:solidFill>
           <a:ln>
             <a:noFill/>
@@ -4709,7 +4933,9 @@
         <p:txBody>
           <a:bodyPr rtlCol="0" anchor="ctr"/>
           <a:lstStyle/>
-          <a:p/>
+          <a:p>
+            <a:pPr algn="ctr"/>
+          </a:p>
         </p:txBody>
       </p:sp>
       <p:sp>
@@ -4720,8 +4946,8 @@
         </p:nvSpPr>
         <p:spPr>
           <a:xfrm>
-            <a:off x="786384" y="292608"/>
-            <a:ext cx="457200" cy="457200"/>
+            <a:off x="10436047" y="6345936"/>
+            <a:ext cx="1097280" cy="274320"/>
           </a:xfrm>
           <a:prstGeom prst="rect">
             <a:avLst/>
@@ -4734,21 +4960,21 @@
           </a:bodyPr>
           <a:lstStyle/>
           <a:p>
-            <a:pPr algn="l">
+            <a:pPr algn="r">
               <a:spcAft>
                 <a:spcPts val="0"/>
               </a:spcAft>
             </a:pPr>
             <a:r>
-              <a:rPr sz="2000" b="1">
-                <a:solidFill>
-                  <a:srgbClr val="2E75B6"/>
-                </a:solidFill>
-                <a:latin typeface="Pretendard"/>
-                <a:ea typeface="Pretendard"/>
-                <a:cs typeface="Pretendard"/>
+              <a:rPr sz="1100" b="0">
+                <a:solidFill>
+                  <a:srgbClr val="9C968C"/>
+                </a:solidFill>
+                <a:latin typeface="KoPubBatang Light"/>
+                <a:ea typeface="KoPubBatang Light"/>
+                <a:cs typeface="KoPubBatang Light"/>
               </a:rPr>
-              <a:t>3</a:t>
+              <a:t>3 / 3</a:t>
             </a:r>
           </a:p>
         </p:txBody>
@@ -4761,8 +4987,8 @@
         </p:nvSpPr>
         <p:spPr>
           <a:xfrm>
-            <a:off x="1152144" y="256032"/>
-            <a:ext cx="10472623" cy="640080"/>
+            <a:off x="786384" y="566928"/>
+            <a:ext cx="9649663" cy="1280160"/>
           </a:xfrm>
           <a:prstGeom prst="rect">
             <a:avLst/>
@@ -4777,22 +5003,23 @@
           <a:p>
             <a:pPr algn="l">
               <a:lnSpc>
-                <a:spcPct val="116000"/>
+                <a:spcPct val="120000"/>
               </a:lnSpc>
               <a:spcAft>
                 <a:spcPts val="0"/>
               </a:spcAft>
             </a:pPr>
             <a:r>
-              <a:rPr sz="2900" b="1">
-                <a:solidFill>
-                  <a:srgbClr val="1F4E79"/>
-                </a:solidFill>
-                <a:latin typeface="Pretendard"/>
-                <a:ea typeface="Pretendard"/>
-                <a:cs typeface="Pretendard"/>
+              <a:rPr sz="3300" b="0">
+                <a:solidFill>
+                  <a:srgbClr val="1C1A17"/>
+                </a:solidFill>
+                <a:latin typeface="KoPubBatang Bold"/>
+                <a:ea typeface="KoPubBatang Bold"/>
+                <a:cs typeface="KoPubBatang Bold"/>
               </a:rPr>
-              <a:t>카메라 8대 그대로, 2대만 옮기니 사각지대가 절반이 됐다</a:t>
+              <a:t>가정한 값으로 설계해도 평균은 비슷하다.
+차이는 사각지대에서 난다</a:t>
             </a:r>
           </a:p>
         </p:txBody>
@@ -4805,14 +5032,14 @@
         </p:nvSpPr>
         <p:spPr>
           <a:xfrm>
-            <a:off x="566928" y="1097280"/>
-            <a:ext cx="11057839" cy="16459"/>
+            <a:off x="786384" y="1847088"/>
+            <a:ext cx="10746943" cy="27940"/>
           </a:xfrm>
           <a:prstGeom prst="rect">
             <a:avLst/>
           </a:prstGeom>
           <a:solidFill>
-            <a:srgbClr val="D8DEE5"/>
+            <a:srgbClr val="1C1A17"/>
           </a:solidFill>
           <a:ln>
             <a:noFill/>
@@ -4836,333 +5063,30 @@
         <p:txBody>
           <a:bodyPr rtlCol="0" anchor="ctr"/>
           <a:lstStyle/>
-          <a:p/>
-        </p:txBody>
-      </p:sp>
-      <p:pic>
-        <p:nvPicPr>
-          <p:cNvPr id="6" name="Picture 5" descr="fig_result.png"/>
-          <p:cNvPicPr>
-            <a:picLocks noChangeAspect="1"/>
-          </p:cNvPicPr>
+          <a:p>
+            <a:pPr algn="ctr"/>
+          </a:p>
+        </p:txBody>
+      </p:sp>
+      <p:sp>
+        <p:nvSpPr>
+          <p:cNvPr id="6" name="Rectangle 5"/>
+          <p:cNvSpPr/>
           <p:nvPr/>
-        </p:nvPicPr>
-        <p:blipFill>
-          <a:blip r:embed="rId2"/>
-          <a:stretch>
-            <a:fillRect/>
-          </a:stretch>
-        </p:blipFill>
-        <p:spPr>
-          <a:xfrm>
-            <a:off x="521207" y="1243584"/>
-            <a:ext cx="6720840" cy="3136392"/>
+        </p:nvSpPr>
+        <p:spPr>
+          <a:xfrm>
+            <a:off x="786384" y="1897380"/>
+            <a:ext cx="10746943" cy="10160"/>
           </a:xfrm>
           <a:prstGeom prst="rect">
             <a:avLst/>
           </a:prstGeom>
-        </p:spPr>
-      </p:pic>
-      <p:sp>
-        <p:nvSpPr>
-          <p:cNvPr id="7" name="TextBox 6"/>
-          <p:cNvSpPr txBox="1"/>
-          <p:nvPr/>
-        </p:nvSpPr>
-        <p:spPr>
-          <a:xfrm>
-            <a:off x="7406640" y="1280160"/>
-            <a:ext cx="4218127" cy="420624"/>
-          </a:xfrm>
-          <a:prstGeom prst="rect">
-            <a:avLst/>
-          </a:prstGeom>
-          <a:noFill/>
-        </p:spPr>
-        <p:txBody>
-          <a:bodyPr wrap="square" anchor="t">
-            <a:spAutoFit/>
-          </a:bodyPr>
-          <a:lstStyle/>
-          <a:p>
-            <a:pPr algn="l">
-              <a:spcAft>
-                <a:spcPts val="0"/>
-              </a:spcAft>
-            </a:pPr>
-            <a:r>
-              <a:rPr sz="2000" b="1">
-                <a:solidFill>
-                  <a:srgbClr val="2E75B6"/>
-                </a:solidFill>
-                <a:latin typeface="Pretendard"/>
-                <a:ea typeface="Pretendard"/>
-                <a:cs typeface="Pretendard"/>
-              </a:rPr>
-              <a:t>계산 순서</a:t>
-            </a:r>
-          </a:p>
-        </p:txBody>
-      </p:sp>
-      <p:sp>
-        <p:nvSpPr>
-          <p:cNvPr id="8" name="TextBox 7"/>
-          <p:cNvSpPr txBox="1"/>
-          <p:nvPr/>
-        </p:nvSpPr>
-        <p:spPr>
-          <a:xfrm>
-            <a:off x="7406640" y="1737360"/>
-            <a:ext cx="4218127" cy="4114800"/>
-          </a:xfrm>
-          <a:prstGeom prst="rect">
-            <a:avLst/>
-          </a:prstGeom>
-          <a:noFill/>
-        </p:spPr>
-        <p:txBody>
-          <a:bodyPr wrap="square" anchor="t">
-            <a:spAutoFit/>
-          </a:bodyPr>
-          <a:lstStyle/>
-          <a:p>
-            <a:pPr algn="l" marL="274320" indent="-274320">
-              <a:lnSpc>
-                <a:spcPct val="126000"/>
-              </a:lnSpc>
-              <a:spcAft>
-                <a:spcPts val="1100"/>
-              </a:spcAft>
-            </a:pPr>
-            <a:r>
-              <a:rPr sz="1400" b="1">
-                <a:solidFill>
-                  <a:srgbClr val="2D2D2D"/>
-                </a:solidFill>
-                <a:latin typeface="Pretendard"/>
-                <a:ea typeface="Pretendard"/>
-                <a:cs typeface="Pretendard"/>
-              </a:rPr>
-              <a:t/>
-            </a:r>
-            <a:r>
-              <a:rPr sz="1400" b="1">
-                <a:solidFill>
-                  <a:srgbClr val="2D2D2D"/>
-                </a:solidFill>
-                <a:latin typeface="Pretendard"/>
-                <a:ea typeface="Pretendard"/>
-                <a:cs typeface="Pretendard"/>
-              </a:rPr>
-              <a:t>현장을 칸으로 나눈다 </a:t>
-            </a:r>
-            <a:r>
-              <a:rPr sz="1400" b="0">
-                <a:solidFill>
-                  <a:srgbClr val="2D2D2D"/>
-                </a:solidFill>
-                <a:latin typeface="Pretendard"/>
-                <a:ea typeface="Pretendard"/>
-                <a:cs typeface="Pretendard"/>
-              </a:rPr>
-              <a:t>— 100×60 m 를 2 m 격자 1,500칸으로. 칸마다 위험도 1~5점.</a:t>
-            </a:r>
-          </a:p>
-          <a:p>
-            <a:pPr algn="l" marL="274320" indent="-274320">
-              <a:lnSpc>
-                <a:spcPct val="126000"/>
-              </a:lnSpc>
-              <a:spcAft>
-                <a:spcPts val="1100"/>
-              </a:spcAft>
-            </a:pPr>
-            <a:r>
-              <a:rPr sz="1400" b="1">
-                <a:solidFill>
-                  <a:srgbClr val="2D2D2D"/>
-                </a:solidFill>
-                <a:latin typeface="Pretendard"/>
-                <a:ea typeface="Pretendard"/>
-                <a:cs typeface="Pretendard"/>
-              </a:rPr>
-              <a:t/>
-            </a:r>
-            <a:r>
-              <a:rPr sz="1400" b="1">
-                <a:solidFill>
-                  <a:srgbClr val="2D2D2D"/>
-                </a:solidFill>
-                <a:latin typeface="Pretendard"/>
-                <a:ea typeface="Pretendard"/>
-                <a:cs typeface="Pretendard"/>
-              </a:rPr>
-              <a:t>칸마다 조건을 잰다 </a:t>
-            </a:r>
-            <a:r>
-              <a:rPr sz="1400" b="0">
-                <a:solidFill>
-                  <a:srgbClr val="2D2D2D"/>
-                </a:solidFill>
-                <a:latin typeface="Pretendard"/>
-                <a:ea typeface="Pretendard"/>
-                <a:cs typeface="Pretendard"/>
-              </a:rPr>
-              <a:t>— 칸에 사람 크기 막대를 세우고 카메라 쪽으로 빛을 쏴 거리·각도·가려진 정도를 구한다.</a:t>
-            </a:r>
-          </a:p>
-          <a:p>
-            <a:pPr algn="l" marL="274320" indent="-274320">
-              <a:lnSpc>
-                <a:spcPct val="126000"/>
-              </a:lnSpc>
-              <a:spcAft>
-                <a:spcPts val="1100"/>
-              </a:spcAft>
-            </a:pPr>
-            <a:r>
-              <a:rPr sz="1400" b="1">
-                <a:solidFill>
-                  <a:srgbClr val="2D2D2D"/>
-                </a:solidFill>
-                <a:latin typeface="Pretendard"/>
-                <a:ea typeface="Pretendard"/>
-                <a:cs typeface="Pretendard"/>
-              </a:rPr>
-              <a:t/>
-            </a:r>
-            <a:r>
-              <a:rPr sz="1400" b="1">
-                <a:solidFill>
-                  <a:srgbClr val="2D2D2D"/>
-                </a:solidFill>
-                <a:latin typeface="Pretendard"/>
-                <a:ea typeface="Pretendard"/>
-                <a:cs typeface="Pretendard"/>
-              </a:rPr>
-              <a:t>검출확률로 바꾼다 </a:t>
-            </a:r>
-            <a:r>
-              <a:rPr sz="1400" b="0">
-                <a:solidFill>
-                  <a:srgbClr val="2D2D2D"/>
-                </a:solidFill>
-                <a:latin typeface="Pretendard"/>
-                <a:ea typeface="Pretendard"/>
-                <a:cs typeface="Pretendard"/>
-              </a:rPr>
-              <a:t>— 2번에서 만든 식에 그 세 숫자를 넣는다.</a:t>
-            </a:r>
-          </a:p>
-          <a:p>
-            <a:pPr algn="l" marL="274320" indent="-274320">
-              <a:lnSpc>
-                <a:spcPct val="126000"/>
-              </a:lnSpc>
-              <a:spcAft>
-                <a:spcPts val="1100"/>
-              </a:spcAft>
-            </a:pPr>
-            <a:r>
-              <a:rPr sz="1400" b="1">
-                <a:solidFill>
-                  <a:srgbClr val="2D2D2D"/>
-                </a:solidFill>
-                <a:latin typeface="Pretendard"/>
-                <a:ea typeface="Pretendard"/>
-                <a:cs typeface="Pretendard"/>
-              </a:rPr>
-              <a:t/>
-            </a:r>
-            <a:r>
-              <a:rPr sz="1400" b="1">
-                <a:solidFill>
-                  <a:srgbClr val="2D2D2D"/>
-                </a:solidFill>
-                <a:latin typeface="Pretendard"/>
-                <a:ea typeface="Pretendard"/>
-                <a:cs typeface="Pretendard"/>
-              </a:rPr>
-              <a:t>카메라를 합친다 </a:t>
-            </a:r>
-            <a:r>
-              <a:rPr sz="1400" b="0">
-                <a:solidFill>
-                  <a:srgbClr val="2D2D2D"/>
-                </a:solidFill>
-                <a:latin typeface="Pretendard"/>
-                <a:ea typeface="Pretendard"/>
-                <a:cs typeface="Pretendard"/>
-              </a:rPr>
-              <a:t>— 한 대가 놓쳐도 다른 대가 잡는다. 겹칠수록 확률이 오른다.</a:t>
-            </a:r>
-          </a:p>
-          <a:p>
-            <a:pPr algn="l" marL="274320" indent="-274320">
-              <a:lnSpc>
-                <a:spcPct val="126000"/>
-              </a:lnSpc>
-              <a:spcAft>
-                <a:spcPts val="1100"/>
-              </a:spcAft>
-            </a:pPr>
-            <a:r>
-              <a:rPr sz="1400" b="1">
-                <a:solidFill>
-                  <a:srgbClr val="2D2D2D"/>
-                </a:solidFill>
-                <a:latin typeface="Pretendard"/>
-                <a:ea typeface="Pretendard"/>
-                <a:cs typeface="Pretendard"/>
-              </a:rPr>
-              <a:t/>
-            </a:r>
-            <a:r>
-              <a:rPr sz="1400" b="1">
-                <a:solidFill>
-                  <a:srgbClr val="2D2D2D"/>
-                </a:solidFill>
-                <a:latin typeface="Pretendard"/>
-                <a:ea typeface="Pretendard"/>
-                <a:cs typeface="Pretendard"/>
-              </a:rPr>
-              <a:t>8대를 고른다 </a:t>
-            </a:r>
-            <a:r>
-              <a:rPr sz="1400" b="0">
-                <a:solidFill>
-                  <a:srgbClr val="2D2D2D"/>
-                </a:solidFill>
-                <a:latin typeface="Pretendard"/>
-                <a:ea typeface="Pretendard"/>
-                <a:cs typeface="Pretendard"/>
-              </a:rPr>
-              <a:t>— 제일 좋은 자리를 한 대씩 8번. 기존 기준과 제안 기준으로 각각 돌려 같은 자로 비교한다.</a:t>
-            </a:r>
-          </a:p>
-        </p:txBody>
-      </p:sp>
-      <p:sp>
-        <p:nvSpPr>
-          <p:cNvPr id="9" name="Rounded Rectangle 8"/>
-          <p:cNvSpPr/>
-          <p:nvPr/>
-        </p:nvSpPr>
-        <p:spPr>
-          <a:xfrm>
-            <a:off x="566928" y="4425696"/>
-            <a:ext cx="6656832" cy="1847088"/>
-          </a:xfrm>
-          <a:prstGeom prst="roundRect">
-            <a:avLst/>
-          </a:prstGeom>
           <a:solidFill>
-            <a:srgbClr val="F2F7FC"/>
+            <a:srgbClr val="D5CFC2"/>
           </a:solidFill>
-          <a:ln w="15240">
-            <a:solidFill>
-              <a:srgbClr val="2E75B6"/>
-            </a:solidFill>
+          <a:ln>
+            <a:noFill/>
           </a:ln>
           <a:effectLst/>
         </p:spPr>
@@ -5183,19 +5107,21 @@
         <p:txBody>
           <a:bodyPr rtlCol="0" anchor="ctr"/>
           <a:lstStyle/>
-          <a:p/>
-        </p:txBody>
-      </p:sp>
-      <p:sp>
-        <p:nvSpPr>
-          <p:cNvPr id="10" name="TextBox 9"/>
+          <a:p>
+            <a:pPr algn="ctr"/>
+          </a:p>
+        </p:txBody>
+      </p:sp>
+      <p:sp>
+        <p:nvSpPr>
+          <p:cNvPr id="7" name="TextBox 6"/>
           <p:cNvSpPr txBox="1"/>
           <p:nvPr/>
         </p:nvSpPr>
         <p:spPr>
           <a:xfrm>
-            <a:off x="841247" y="4562856"/>
-            <a:ext cx="6108192" cy="1609344"/>
+            <a:off x="1609344" y="2108708"/>
+            <a:ext cx="9101023" cy="841248"/>
           </a:xfrm>
           <a:prstGeom prst="rect">
             <a:avLst/>
@@ -5210,111 +5136,236 @@
           <a:p>
             <a:pPr algn="l">
               <a:lnSpc>
-                <a:spcPct val="132000"/>
+                <a:spcPct val="142000"/>
               </a:lnSpc>
               <a:spcAft>
-                <a:spcPts val="800"/>
+                <a:spcPts val="0"/>
               </a:spcAft>
             </a:pPr>
             <a:r>
+              <a:rPr sz="1900" b="0">
+                <a:solidFill>
+                  <a:srgbClr val="34312B"/>
+                </a:solidFill>
+                <a:latin typeface="KoPubBatang Light"/>
+                <a:ea typeface="KoPubBatang Light"/>
+                <a:cs typeface="KoPubBatang Light"/>
+              </a:rPr>
+              <a:t>카메라 8대와 후보 자리는 그대로 두고 배치만 세 번 다르게 짰다. 셋 다 직접 잰 값으로 다시 채점했다. 사각지대는 </a:t>
+            </a:r>
+            <a:r>
+              <a:rPr sz="1900" b="0">
+                <a:solidFill>
+                  <a:srgbClr val="A33B29"/>
+                </a:solidFill>
+                <a:latin typeface="KoPubBatang Bold"/>
+                <a:ea typeface="KoPubBatang Bold"/>
+                <a:cs typeface="KoPubBatang Bold"/>
+              </a:rPr>
+              <a:t>1,256칸 중 334 → 256 → 168칸</a:t>
+            </a:r>
+            <a:r>
+              <a:rPr sz="1900" b="0">
+                <a:solidFill>
+                  <a:srgbClr val="34312B"/>
+                </a:solidFill>
+                <a:latin typeface="KoPubBatang Light"/>
+                <a:ea typeface="KoPubBatang Light"/>
+                <a:cs typeface="KoPubBatang Light"/>
+              </a:rPr>
+              <a:t>으로 갈렸다.</a:t>
+            </a:r>
+          </a:p>
+        </p:txBody>
+      </p:sp>
+      <p:pic>
+        <p:nvPicPr>
+          <p:cNvPr id="8" name="Picture 7" descr="fig_three.png"/>
+          <p:cNvPicPr>
+            <a:picLocks noChangeAspect="1"/>
+          </p:cNvPicPr>
+          <p:nvPr/>
+        </p:nvPicPr>
+        <p:blipFill>
+          <a:blip r:embed="rId2"/>
+          <a:stretch>
+            <a:fillRect/>
+          </a:stretch>
+        </p:blipFill>
+        <p:spPr>
+          <a:xfrm>
+            <a:off x="1203807" y="3023108"/>
+            <a:ext cx="9784080" cy="2016894"/>
+          </a:xfrm>
+          <a:prstGeom prst="rect">
+            <a:avLst/>
+          </a:prstGeom>
+        </p:spPr>
+      </p:pic>
+      <p:sp>
+        <p:nvSpPr>
+          <p:cNvPr id="9" name="Rectangle 8"/>
+          <p:cNvSpPr/>
+          <p:nvPr/>
+        </p:nvSpPr>
+        <p:spPr>
+          <a:xfrm>
+            <a:off x="786384" y="5186305"/>
+            <a:ext cx="10746943" cy="11430"/>
+          </a:xfrm>
+          <a:prstGeom prst="rect">
+            <a:avLst/>
+          </a:prstGeom>
+          <a:solidFill>
+            <a:srgbClr val="D5CFC2"/>
+          </a:solidFill>
+          <a:ln>
+            <a:noFill/>
+          </a:ln>
+          <a:effectLst/>
+        </p:spPr>
+        <p:style>
+          <a:lnRef idx="1">
+            <a:schemeClr val="accent1"/>
+          </a:lnRef>
+          <a:fillRef idx="3">
+            <a:schemeClr val="accent1"/>
+          </a:fillRef>
+          <a:effectRef idx="2">
+            <a:schemeClr val="accent1"/>
+          </a:effectRef>
+          <a:fontRef idx="minor">
+            <a:schemeClr val="lt1"/>
+          </a:fontRef>
+        </p:style>
+        <p:txBody>
+          <a:bodyPr rtlCol="0" anchor="ctr"/>
+          <a:lstStyle/>
+          <a:p>
+            <a:pPr algn="ctr"/>
+          </a:p>
+        </p:txBody>
+      </p:sp>
+      <p:sp>
+        <p:nvSpPr>
+          <p:cNvPr id="10" name="TextBox 9"/>
+          <p:cNvSpPr txBox="1"/>
+          <p:nvPr/>
+        </p:nvSpPr>
+        <p:spPr>
+          <a:xfrm>
+            <a:off x="786384" y="5332609"/>
+            <a:ext cx="5007711" cy="1005840"/>
+          </a:xfrm>
+          <a:prstGeom prst="rect">
+            <a:avLst/>
+          </a:prstGeom>
+          <a:noFill/>
+        </p:spPr>
+        <p:txBody>
+          <a:bodyPr wrap="square" anchor="t">
+            <a:spAutoFit/>
+          </a:bodyPr>
+          <a:lstStyle/>
+          <a:p>
+            <a:pPr algn="l">
+              <a:lnSpc>
+                <a:spcPct val="148000"/>
+              </a:lnSpc>
+              <a:spcAft>
+                <a:spcPts val="0"/>
+              </a:spcAft>
+            </a:pPr>
+            <a:r>
               <a:rPr sz="1200" b="1">
                 <a:solidFill>
-                  <a:srgbClr val="1F4E79"/>
+                  <a:srgbClr val="1C1A17"/>
                 </a:solidFill>
                 <a:latin typeface="Pretendard"/>
                 <a:ea typeface="Pretendard"/>
                 <a:cs typeface="Pretendard"/>
               </a:rPr>
-              <a:t>공정하게 비교했나 — </a:t>
+              <a:t>왜 갈리나  </a:t>
             </a:r>
             <a:r>
               <a:rPr sz="1200" b="0">
                 <a:solidFill>
-                  <a:srgbClr val="1F4E79"/>
+                  <a:srgbClr val="34312B"/>
                 </a:solidFill>
                 <a:latin typeface="Pretendard"/>
                 <a:ea typeface="Pretendard"/>
                 <a:cs typeface="Pretendard"/>
               </a:rPr>
-              <a:t>기존 기준에도 국제표준의 최소 픽셀 조건을 걸어 실무 수준으로 올리고, 4단계 중 기존 방식에 가장 유리한 단계를 골랐다.</a:t>
-            </a:r>
-          </a:p>
+              <a:t>가정한 값은 가림을 막혔다·안 막혔다 둘 중 하나로 본다. 조금 가려진 곳을 괜찮다고 넘기는데, 그런 곳이 곧 사각지대다. 평균이 아니라 나쁜 쪽에서 갈린다(0.17%p 대 88칸).</a:t>
+            </a:r>
+          </a:p>
+        </p:txBody>
+      </p:sp>
+      <p:sp>
+        <p:nvSpPr>
+          <p:cNvPr id="11" name="TextBox 10"/>
+          <p:cNvSpPr txBox="1"/>
+          <p:nvPr/>
+        </p:nvSpPr>
+        <p:spPr>
+          <a:xfrm>
+            <a:off x="6525615" y="5332609"/>
+            <a:ext cx="5007711" cy="1005840"/>
+          </a:xfrm>
+          <a:prstGeom prst="rect">
+            <a:avLst/>
+          </a:prstGeom>
+          <a:noFill/>
+        </p:spPr>
+        <p:txBody>
+          <a:bodyPr wrap="square" anchor="t">
+            <a:spAutoFit/>
+          </a:bodyPr>
+          <a:lstStyle/>
           <a:p>
             <a:pPr algn="l">
               <a:lnSpc>
-                <a:spcPct val="132000"/>
+                <a:spcPct val="148000"/>
               </a:lnSpc>
               <a:spcAft>
-                <a:spcPts val="800"/>
+                <a:spcPts val="0"/>
               </a:spcAft>
             </a:pPr>
             <a:r>
               <a:rPr sz="1200" b="1">
                 <a:solidFill>
-                  <a:srgbClr val="1F4E79"/>
+                  <a:srgbClr val="1C1A17"/>
                 </a:solidFill>
                 <a:latin typeface="Pretendard"/>
                 <a:ea typeface="Pretendard"/>
                 <a:cs typeface="Pretendard"/>
               </a:rPr>
-              <a:t>수치를 믿을 수 있나 — </a:t>
+              <a:t>기준을 바꿔도  </a:t>
             </a:r>
             <a:r>
               <a:rPr sz="1200" b="0">
                 <a:solidFill>
-                  <a:srgbClr val="1F4E79"/>
+                  <a:srgbClr val="34312B"/>
                 </a:solidFill>
                 <a:latin typeface="Pretendard"/>
                 <a:ea typeface="Pretendard"/>
                 <a:cs typeface="Pretendard"/>
               </a:rPr>
-              <a:t>근거 없는 값 2개를 바꿔가며 다시 계산하면 검출률 자체는 48.6~84.1% 로 흔들린다. 그래도 두 방식의 차이는 항상 +2.49~+3.56%p 다.</a:t>
-            </a:r>
-          </a:p>
-          <a:p>
-            <a:pPr algn="l">
-              <a:lnSpc>
-                <a:spcPct val="132000"/>
-              </a:lnSpc>
-              <a:spcAft>
-                <a:spcPts val="800"/>
-              </a:spcAft>
-            </a:pPr>
-            <a:r>
-              <a:rPr sz="1200" b="1">
-                <a:solidFill>
-                  <a:srgbClr val="1F4E79"/>
-                </a:solidFill>
-                <a:latin typeface="Pretendard"/>
-                <a:ea typeface="Pretendard"/>
-                <a:cs typeface="Pretendard"/>
-              </a:rPr>
-              <a:t>한계 — </a:t>
-            </a:r>
-            <a:r>
-              <a:rPr sz="1200" b="0">
-                <a:solidFill>
-                  <a:srgbClr val="1F4E79"/>
-                </a:solidFill>
-                <a:latin typeface="Pretendard"/>
-                <a:ea typeface="Pretendard"/>
-                <a:cs typeface="Pretendard"/>
-              </a:rPr>
-              <a:t>사진을 흐리게·기울여 만든 것이라 실제 원거리 촬영과 다르고, 가상 현장이다. 그래서 절대 수치가 아니라 관계만 주장한다.</a:t>
-            </a:r>
-          </a:p>
-        </p:txBody>
-      </p:sp>
-      <p:sp>
-        <p:nvSpPr>
-          <p:cNvPr id="11" name="TextBox 10"/>
+              <a:t>사각지대로 치는 선을 0.4·0.5·0.6으로 바꿔도 제안 쪽이 늘 적다. 줄어드는 양은 각각 106·166·64칸이며, 0.6에서는 차이가 좁아진다. 가상 현장이라 숫자 자체가 아니라 세 배치의 순서를 주장한다.</a:t>
+            </a:r>
+          </a:p>
+        </p:txBody>
+      </p:sp>
+      <p:sp>
+        <p:nvSpPr>
+          <p:cNvPr id="12" name="TextBox 11"/>
           <p:cNvSpPr txBox="1"/>
           <p:nvPr/>
         </p:nvSpPr>
         <p:spPr>
           <a:xfrm>
-            <a:off x="566928" y="6345936"/>
-            <a:ext cx="11057839" cy="402336"/>
+            <a:off x="786384" y="6345936"/>
+            <a:ext cx="9466783" cy="310896"/>
           </a:xfrm>
           <a:prstGeom prst="rect">
             <a:avLst/>
@@ -5336,15 +5387,15 @@
               </a:spcAft>
             </a:pPr>
             <a:r>
-              <a:rPr sz="1300" b="0">
-                <a:solidFill>
-                  <a:srgbClr val="7E7E7E"/>
+              <a:rPr sz="1100" b="0">
+                <a:solidFill>
+                  <a:srgbClr val="9C968C"/>
                 </a:solidFill>
                 <a:latin typeface="Pretendard"/>
                 <a:ea typeface="Pretendard"/>
                 <a:cs typeface="Pretendard"/>
               </a:rPr>
-              <a:t>위험가중 검출률 = 위험한 칸에 가중치를 주고 평균한 검출확률 · 사각지대 = 검출확률이 50% 미만인 칸</a:t>
+              <a:t>현장 100×60 m · 카메라 자리 후보 24곳에서 8대 · 비교 대상인 기존 방식은 국제표준 네 등급을 다 돌려보고 기존 방식에 가장 유리한 등급으로 정했다 · 가정한 값은 국제표준의 두 지점(125·250 PPM)으로 고정 · 한 대씩 고르는 방식이지만 최적해의 63% 이상이 보장된다</a:t>
             </a:r>
           </a:p>
         </p:txBody>

--- a/outputs/주제설명_3장.pptx
+++ b/outputs/주제설명_3장.pptx
@@ -4096,7 +4096,7 @@
         <p:spPr>
           <a:xfrm>
             <a:off x="786384" y="566928"/>
-            <a:ext cx="10746943" cy="640080"/>
+            <a:ext cx="10746943" cy="1188720"/>
           </a:xfrm>
           <a:prstGeom prst="rect">
             <a:avLst/>
@@ -4111,14 +4111,14 @@
           <a:p>
             <a:pPr algn="l">
               <a:lnSpc>
-                <a:spcPct val="118000"/>
+                <a:spcPct val="120000"/>
               </a:lnSpc>
               <a:spcAft>
                 <a:spcPts val="0"/>
               </a:spcAft>
             </a:pPr>
             <a:r>
-              <a:rPr sz="3200" b="0">
+              <a:rPr sz="3100" b="0">
                 <a:solidFill>
                   <a:srgbClr val="1C1A17"/>
                 </a:solidFill>
@@ -4126,64 +4126,21 @@
                 <a:ea typeface="KoPubBatang Bold"/>
                 <a:cs typeface="KoPubBatang Bold"/>
               </a:rPr>
-              <a:t>지금 기준이 정한 것이 셋 중 영향이 가장 작았다</a:t>
-            </a:r>
-          </a:p>
-        </p:txBody>
-      </p:sp>
-      <p:sp>
-        <p:nvSpPr>
-          <p:cNvPr id="5" name="TextBox 4"/>
-          <p:cNvSpPr txBox="1"/>
-          <p:nvPr/>
-        </p:nvSpPr>
-        <p:spPr>
-          <a:xfrm>
-            <a:off x="786384" y="1078992"/>
-            <a:ext cx="9649663" cy="292608"/>
-          </a:xfrm>
-          <a:prstGeom prst="rect">
-            <a:avLst/>
-          </a:prstGeom>
-          <a:noFill/>
-        </p:spPr>
-        <p:txBody>
-          <a:bodyPr wrap="square" anchor="t">
-            <a:spAutoFit/>
-          </a:bodyPr>
-          <a:lstStyle/>
-          <a:p>
-            <a:pPr algn="l">
-              <a:lnSpc>
-                <a:spcPct val="140000"/>
-              </a:lnSpc>
-              <a:spcAft>
-                <a:spcPts val="0"/>
-              </a:spcAft>
-            </a:pPr>
-            <a:r>
-              <a:rPr sz="1450" b="0">
-                <a:solidFill>
-                  <a:srgbClr val="77726A"/>
-                </a:solidFill>
-                <a:latin typeface="Pretendard"/>
-                <a:ea typeface="Pretendard"/>
-                <a:cs typeface="Pretendard"/>
-              </a:rPr>
-              <a:t>셋은 단위가 달라 그대로 견줄 수 없다. 검출률이 90%까지 떨어지는 지점으로 맞춰 비교했다.</a:t>
-            </a:r>
-          </a:p>
-        </p:txBody>
-      </p:sp>
-      <p:sp>
-        <p:nvSpPr>
-          <p:cNvPr id="6" name="Rectangle 5"/>
+              <a:t>AI가 못 찾는 이유는 거리·각도·가려짐 셋.
+기준이 정한 것은 그중 영향이 가장 작았다</a:t>
+            </a:r>
+          </a:p>
+        </p:txBody>
+      </p:sp>
+      <p:sp>
+        <p:nvSpPr>
+          <p:cNvPr id="5" name="Rectangle 4"/>
           <p:cNvSpPr/>
           <p:nvPr/>
         </p:nvSpPr>
         <p:spPr>
           <a:xfrm>
-            <a:off x="786384" y="1444752"/>
+            <a:off x="786384" y="1847088"/>
             <a:ext cx="10746943" cy="11430"/>
           </a:xfrm>
           <a:prstGeom prst="rect">
@@ -4219,6 +4176,50 @@
           </a:p>
         </p:txBody>
       </p:sp>
+      <p:sp>
+        <p:nvSpPr>
+          <p:cNvPr id="6" name="TextBox 5"/>
+          <p:cNvSpPr txBox="1"/>
+          <p:nvPr/>
+        </p:nvSpPr>
+        <p:spPr>
+          <a:xfrm>
+            <a:off x="786384" y="1975104"/>
+            <a:ext cx="9832543" cy="603336"/>
+          </a:xfrm>
+          <a:prstGeom prst="rect">
+            <a:avLst/>
+          </a:prstGeom>
+          <a:noFill/>
+        </p:spPr>
+        <p:txBody>
+          <a:bodyPr wrap="square" anchor="t">
+            <a:spAutoFit/>
+          </a:bodyPr>
+          <a:lstStyle/>
+          <a:p>
+            <a:pPr algn="l">
+              <a:lnSpc>
+                <a:spcPct val="146000"/>
+              </a:lnSpc>
+              <a:spcAft>
+                <a:spcPts val="0"/>
+              </a:spcAft>
+            </a:pPr>
+            <a:r>
+              <a:rPr sz="1450" b="0">
+                <a:solidFill>
+                  <a:srgbClr val="77726A"/>
+                </a:solidFill>
+                <a:latin typeface="Pretendard"/>
+                <a:ea typeface="Pretendard"/>
+                <a:cs typeface="Pretendard"/>
+              </a:rPr>
+              <a:t>가려지면 잘 못 찾는다는 건 다 아는 이야기다. 여기서 한 일은 그게 얼마나 나쁜지를 288가지 조건에서 직접 재어, 카메라 자리를 계산할 때 쓸 수 있는 식으로 만든 것이다.</a:t>
+            </a:r>
+          </a:p>
+        </p:txBody>
+      </p:sp>
       <p:pic>
         <p:nvPicPr>
           <p:cNvPr id="7" name="Picture 6" descr="fig_curves.png"/>
@@ -4235,8 +4236,8 @@
         </p:blipFill>
         <p:spPr>
           <a:xfrm>
-            <a:off x="731520" y="1572768"/>
-            <a:ext cx="10424160" cy="2788920"/>
+            <a:off x="1798167" y="2706456"/>
+            <a:ext cx="8595360" cy="2299636"/>
           </a:xfrm>
           <a:prstGeom prst="rect">
             <a:avLst/>
@@ -4251,8 +4252,8 @@
         </p:nvSpPr>
         <p:spPr>
           <a:xfrm>
-            <a:off x="786384" y="4562856"/>
-            <a:ext cx="3307994" cy="256032"/>
+            <a:off x="786384" y="5124964"/>
+            <a:ext cx="10746943" cy="256032"/>
           </a:xfrm>
           <a:prstGeom prst="rect">
             <a:avLst/>
@@ -4279,7 +4280,7 @@
                 <a:ea typeface="Pretendard"/>
                 <a:cs typeface="Pretendard"/>
               </a:rPr>
-              <a:t>카메라와의 거리</a:t>
+              <a:t>세 가지는 단위가 달라 그대로 견줄 수 없다. 아래는 검출률이 90%까지 떨어지는 지점이다.</a:t>
             </a:r>
           </a:p>
         </p:txBody>
@@ -4292,8 +4293,8 @@
         </p:nvSpPr>
         <p:spPr>
           <a:xfrm>
-            <a:off x="786384" y="4818888"/>
-            <a:ext cx="3307994" cy="512064"/>
+            <a:off x="786384" y="5426716"/>
+            <a:ext cx="3307994" cy="256032"/>
           </a:xfrm>
           <a:prstGeom prst="rect">
             <a:avLst/>
@@ -4312,6 +4313,47 @@
               </a:spcAft>
             </a:pPr>
             <a:r>
+              <a:rPr sz="1150" b="0">
+                <a:solidFill>
+                  <a:srgbClr val="77726A"/>
+                </a:solidFill>
+                <a:latin typeface="Pretendard"/>
+                <a:ea typeface="Pretendard"/>
+                <a:cs typeface="Pretendard"/>
+              </a:rPr>
+              <a:t>카메라와의 거리</a:t>
+            </a:r>
+          </a:p>
+        </p:txBody>
+      </p:sp>
+      <p:sp>
+        <p:nvSpPr>
+          <p:cNvPr id="10" name="TextBox 9"/>
+          <p:cNvSpPr txBox="1"/>
+          <p:nvPr/>
+        </p:nvSpPr>
+        <p:spPr>
+          <a:xfrm>
+            <a:off x="786384" y="5682748"/>
+            <a:ext cx="3307994" cy="512064"/>
+          </a:xfrm>
+          <a:prstGeom prst="rect">
+            <a:avLst/>
+          </a:prstGeom>
+          <a:noFill/>
+        </p:spPr>
+        <p:txBody>
+          <a:bodyPr wrap="square" anchor="t">
+            <a:spAutoFit/>
+          </a:bodyPr>
+          <a:lstStyle/>
+          <a:p>
+            <a:pPr algn="l">
+              <a:spcAft>
+                <a:spcPts val="0"/>
+              </a:spcAft>
+            </a:pPr>
+            <a:r>
               <a:rPr sz="3000" b="0">
                 <a:solidFill>
                   <a:srgbClr val="1C1A17"/>
@@ -4338,13 +4380,13 @@
       </p:sp>
       <p:sp>
         <p:nvSpPr>
-          <p:cNvPr id="10" name="TextBox 9"/>
+          <p:cNvPr id="11" name="TextBox 10"/>
           <p:cNvSpPr txBox="1"/>
           <p:nvPr/>
         </p:nvSpPr>
         <p:spPr>
           <a:xfrm>
-            <a:off x="786384" y="5330952"/>
+            <a:off x="786384" y="6194812"/>
             <a:ext cx="3307994" cy="274320"/>
           </a:xfrm>
           <a:prstGeom prst="rect">
@@ -4379,13 +4421,13 @@
       </p:sp>
       <p:sp>
         <p:nvSpPr>
-          <p:cNvPr id="11" name="Rectangle 10"/>
+          <p:cNvPr id="12" name="Rectangle 11"/>
           <p:cNvSpPr/>
           <p:nvPr/>
         </p:nvSpPr>
         <p:spPr>
           <a:xfrm>
-            <a:off x="4286402" y="4599432"/>
+            <a:off x="4286402" y="5463292"/>
             <a:ext cx="11430" cy="932688"/>
           </a:xfrm>
           <a:prstGeom prst="rect">
@@ -4423,13 +4465,13 @@
       </p:sp>
       <p:sp>
         <p:nvSpPr>
-          <p:cNvPr id="12" name="TextBox 11"/>
+          <p:cNvPr id="13" name="TextBox 12"/>
           <p:cNvSpPr txBox="1"/>
           <p:nvPr/>
         </p:nvSpPr>
         <p:spPr>
           <a:xfrm>
-            <a:off x="4505858" y="4562856"/>
+            <a:off x="4505858" y="5426716"/>
             <a:ext cx="3307994" cy="256032"/>
           </a:xfrm>
           <a:prstGeom prst="rect">
@@ -4464,13 +4506,13 @@
       </p:sp>
       <p:sp>
         <p:nvSpPr>
-          <p:cNvPr id="13" name="TextBox 12"/>
+          <p:cNvPr id="14" name="TextBox 13"/>
           <p:cNvSpPr txBox="1"/>
           <p:nvPr/>
         </p:nvSpPr>
         <p:spPr>
           <a:xfrm>
-            <a:off x="4505858" y="4818888"/>
+            <a:off x="4505858" y="5682748"/>
             <a:ext cx="3307994" cy="512064"/>
           </a:xfrm>
           <a:prstGeom prst="rect">
@@ -4516,13 +4558,13 @@
       </p:sp>
       <p:sp>
         <p:nvSpPr>
-          <p:cNvPr id="14" name="TextBox 13"/>
+          <p:cNvPr id="15" name="TextBox 14"/>
           <p:cNvSpPr txBox="1"/>
           <p:nvPr/>
         </p:nvSpPr>
         <p:spPr>
           <a:xfrm>
-            <a:off x="4505858" y="5330952"/>
+            <a:off x="4505858" y="6194812"/>
             <a:ext cx="3307994" cy="274320"/>
           </a:xfrm>
           <a:prstGeom prst="rect">
@@ -4557,13 +4599,13 @@
       </p:sp>
       <p:sp>
         <p:nvSpPr>
-          <p:cNvPr id="15" name="Rectangle 14"/>
+          <p:cNvPr id="16" name="Rectangle 15"/>
           <p:cNvSpPr/>
           <p:nvPr/>
         </p:nvSpPr>
         <p:spPr>
           <a:xfrm>
-            <a:off x="8005876" y="4599432"/>
+            <a:off x="8005876" y="5463292"/>
             <a:ext cx="11430" cy="932688"/>
           </a:xfrm>
           <a:prstGeom prst="rect">
@@ -4601,13 +4643,13 @@
       </p:sp>
       <p:sp>
         <p:nvSpPr>
-          <p:cNvPr id="16" name="TextBox 15"/>
+          <p:cNvPr id="17" name="TextBox 16"/>
           <p:cNvSpPr txBox="1"/>
           <p:nvPr/>
         </p:nvSpPr>
         <p:spPr>
           <a:xfrm>
-            <a:off x="8225332" y="4562856"/>
+            <a:off x="8225332" y="5426716"/>
             <a:ext cx="3307994" cy="256032"/>
           </a:xfrm>
           <a:prstGeom prst="rect">
@@ -4642,13 +4684,13 @@
       </p:sp>
       <p:sp>
         <p:nvSpPr>
-          <p:cNvPr id="17" name="TextBox 16"/>
+          <p:cNvPr id="18" name="TextBox 17"/>
           <p:cNvSpPr txBox="1"/>
           <p:nvPr/>
         </p:nvSpPr>
         <p:spPr>
           <a:xfrm>
-            <a:off x="8225332" y="4818888"/>
+            <a:off x="8225332" y="5682748"/>
             <a:ext cx="3307994" cy="512064"/>
           </a:xfrm>
           <a:prstGeom prst="rect">
@@ -4694,13 +4736,13 @@
       </p:sp>
       <p:sp>
         <p:nvSpPr>
-          <p:cNvPr id="18" name="TextBox 17"/>
+          <p:cNvPr id="19" name="TextBox 18"/>
           <p:cNvSpPr txBox="1"/>
           <p:nvPr/>
         </p:nvSpPr>
         <p:spPr>
           <a:xfrm>
-            <a:off x="8225332" y="5330952"/>
+            <a:off x="8225332" y="6194812"/>
             <a:ext cx="3307994" cy="274320"/>
           </a:xfrm>
           <a:prstGeom prst="rect">
@@ -4735,106 +4777,7 @@
       </p:sp>
       <p:sp>
         <p:nvSpPr>
-          <p:cNvPr id="19" name="Rectangle 18"/>
-          <p:cNvSpPr/>
-          <p:nvPr/>
-        </p:nvSpPr>
-        <p:spPr>
-          <a:xfrm>
-            <a:off x="786384" y="5696712"/>
-            <a:ext cx="10746943" cy="11430"/>
-          </a:xfrm>
-          <a:prstGeom prst="rect">
-            <a:avLst/>
-          </a:prstGeom>
-          <a:solidFill>
-            <a:srgbClr val="D5CFC2"/>
-          </a:solidFill>
-          <a:ln>
-            <a:noFill/>
-          </a:ln>
-          <a:effectLst/>
-        </p:spPr>
-        <p:style>
-          <a:lnRef idx="1">
-            <a:schemeClr val="accent1"/>
-          </a:lnRef>
-          <a:fillRef idx="3">
-            <a:schemeClr val="accent1"/>
-          </a:fillRef>
-          <a:effectRef idx="2">
-            <a:schemeClr val="accent1"/>
-          </a:effectRef>
-          <a:fontRef idx="minor">
-            <a:schemeClr val="lt1"/>
-          </a:fontRef>
-        </p:style>
-        <p:txBody>
-          <a:bodyPr rtlCol="0" anchor="ctr"/>
-          <a:lstStyle/>
-          <a:p>
-            <a:pPr algn="ctr"/>
-          </a:p>
-        </p:txBody>
-      </p:sp>
-      <p:sp>
-        <p:nvSpPr>
           <p:cNvPr id="20" name="TextBox 19"/>
-          <p:cNvSpPr txBox="1"/>
-          <p:nvPr/>
-        </p:nvSpPr>
-        <p:spPr>
-          <a:xfrm>
-            <a:off x="786384" y="5833872"/>
-            <a:ext cx="10472623" cy="603504"/>
-          </a:xfrm>
-          <a:prstGeom prst="rect">
-            <a:avLst/>
-          </a:prstGeom>
-          <a:noFill/>
-        </p:spPr>
-        <p:txBody>
-          <a:bodyPr wrap="square" anchor="t">
-            <a:spAutoFit/>
-          </a:bodyPr>
-          <a:lstStyle/>
-          <a:p>
-            <a:pPr algn="l">
-              <a:lnSpc>
-                <a:spcPct val="148000"/>
-              </a:lnSpc>
-              <a:spcAft>
-                <a:spcPts val="0"/>
-              </a:spcAft>
-            </a:pPr>
-            <a:r>
-              <a:rPr sz="1200" b="1">
-                <a:solidFill>
-                  <a:srgbClr val="1C1A17"/>
-                </a:solidFill>
-                <a:latin typeface="Pretendard"/>
-                <a:ea typeface="Pretendard"/>
-                <a:cs typeface="Pretendard"/>
-              </a:rPr>
-              <a:t>어느 게 나쁘냐가 아니라 얼마나 나쁘냐  </a:t>
-            </a:r>
-            <a:r>
-              <a:rPr sz="1200" b="0">
-                <a:solidFill>
-                  <a:srgbClr val="34312B"/>
-                </a:solidFill>
-                <a:latin typeface="Pretendard"/>
-                <a:ea typeface="Pretendard"/>
-                <a:cs typeface="Pretendard"/>
-              </a:rPr>
-              <a:t>가려지면 잘 못 찾는다는 건 다 아는 이야기다. 여기서 한 일은 그게 얼마나 나쁜지를 288가지 조건에서 직접 재어, 배치 계산에 넣을 수 있는 식으로 만든 것이다. 기존 연구는 가림을 막혔다·안 막혔다 둘 중 하나로만 다룬다. 위 세 값은 식으로 계산한 지점이고, 실제로 재본 가림은 15%부터다.</a:t>
-            </a:r>
-          </a:p>
-        </p:txBody>
-      </p:sp>
-      <p:sp>
-        <p:nvSpPr>
-          <p:cNvPr id="21" name="TextBox 20"/>
           <p:cNvSpPr txBox="1"/>
           <p:nvPr/>
         </p:nvSpPr>
@@ -4871,7 +4814,7 @@
                 <a:ea typeface="Pretendard"/>
                 <a:cs typeface="Pretendard"/>
               </a:rPr>
-              <a:t>안전모 사진 500장 · 세로축은 아무 조건도 안 걸었을 때(93.7%)를 1로 둔 비율 · 세 조건을 곱해 쓰는 식, 설명력 0.898 · 검출기는 안전모 사진으로 추가 학습시킨 YOLOv8n · 거리는 4K 해상도, 화각 90° 기준</a:t>
+              <a:t>안전모 사진 500장을 흐리게·기울여·세로줄로 가려 만든 288가지 상태 · 세로축은 아무 조건도 안 걸었을 때(93.7%)를 1로 둔 비율 · 세 조건을 곱해 쓰는 식, 설명력 0.898 · 위 세 값은 식으로 계산한 지점이고 실제로 재본 가려짐은 15%부터다 · 거리는 4K 해상도, 화각 90° 기준</a:t>
             </a:r>
           </a:p>
         </p:txBody>
@@ -4988,7 +4931,7 @@
         <p:spPr>
           <a:xfrm>
             <a:off x="786384" y="566928"/>
-            <a:ext cx="9649663" cy="1280160"/>
+            <a:ext cx="9649663" cy="1188720"/>
           </a:xfrm>
           <a:prstGeom prst="rect">
             <a:avLst/>
@@ -5010,7 +4953,7 @@
               </a:spcAft>
             </a:pPr>
             <a:r>
-              <a:rPr sz="3300" b="0">
+              <a:rPr sz="3100" b="0">
                 <a:solidFill>
                   <a:srgbClr val="1C1A17"/>
                 </a:solidFill>
@@ -5018,8 +4961,8 @@
                 <a:ea typeface="KoPubBatang Bold"/>
                 <a:cs typeface="KoPubBatang Bold"/>
               </a:rPr>
-              <a:t>가정한 값으로 설계해도 평균은 비슷하다.
-차이는 사각지대에서 난다</a:t>
+              <a:t>가정한 값으로 배치해도 평균 점수는 비슷하다.
+그런데 사각지대가 더 남는다</a:t>
             </a:r>
           </a:p>
         </p:txBody>
@@ -5121,7 +5064,7 @@
         <p:spPr>
           <a:xfrm>
             <a:off x="1609344" y="2108708"/>
-            <a:ext cx="9101023" cy="841248"/>
+            <a:ext cx="9101023" cy="1048176"/>
           </a:xfrm>
           <a:prstGeom prst="rect">
             <a:avLst/>
@@ -5143,7 +5086,7 @@
               </a:spcAft>
             </a:pPr>
             <a:r>
-              <a:rPr sz="1900" b="0">
+              <a:rPr sz="1800" b="0">
                 <a:solidFill>
                   <a:srgbClr val="34312B"/>
                 </a:solidFill>
@@ -5151,29 +5094,7 @@
                 <a:ea typeface="KoPubBatang Light"/>
                 <a:cs typeface="KoPubBatang Light"/>
               </a:rPr>
-              <a:t>카메라 8대와 후보 자리는 그대로 두고 배치만 세 번 다르게 짰다. 셋 다 직접 잰 값으로 다시 채점했다. 사각지대는 </a:t>
-            </a:r>
-            <a:r>
-              <a:rPr sz="1900" b="0">
-                <a:solidFill>
-                  <a:srgbClr val="A33B29"/>
-                </a:solidFill>
-                <a:latin typeface="KoPubBatang Bold"/>
-                <a:ea typeface="KoPubBatang Bold"/>
-                <a:cs typeface="KoPubBatang Bold"/>
-              </a:rPr>
-              <a:t>1,256칸 중 334 → 256 → 168칸</a:t>
-            </a:r>
-            <a:r>
-              <a:rPr sz="1900" b="0">
-                <a:solidFill>
-                  <a:srgbClr val="34312B"/>
-                </a:solidFill>
-                <a:latin typeface="KoPubBatang Light"/>
-                <a:ea typeface="KoPubBatang Light"/>
-                <a:cs typeface="KoPubBatang Light"/>
-              </a:rPr>
-              <a:t>으로 갈렸다.</a:t>
+              <a:t>카메라 8대와 달 수 있는 자리는 그대로 두고, 배치만 세 가지 방법으로 짰다. ① 눈에 보이기만 하면 되는 방법 ② 재보지 않고 식으로 가정한 값 ③ 우리가 직접 잰 값. 셋 다 ③의 자로 다시 채점했다.</a:t>
             </a:r>
           </a:p>
         </p:txBody>
@@ -5194,8 +5115,8 @@
         </p:blipFill>
         <p:spPr>
           <a:xfrm>
-            <a:off x="1203807" y="3023108"/>
-            <a:ext cx="9784080" cy="2016894"/>
+            <a:off x="1432407" y="3284900"/>
+            <a:ext cx="9326880" cy="1922646"/>
           </a:xfrm>
           <a:prstGeom prst="rect">
             <a:avLst/>
@@ -5210,7 +5131,7 @@
         </p:nvSpPr>
         <p:spPr>
           <a:xfrm>
-            <a:off x="786384" y="5186305"/>
+            <a:off x="786384" y="5317275"/>
             <a:ext cx="10746943" cy="11430"/>
           </a:xfrm>
           <a:prstGeom prst="rect">
@@ -5254,7 +5175,7 @@
         </p:nvSpPr>
         <p:spPr>
           <a:xfrm>
-            <a:off x="786384" y="5332609"/>
+            <a:off x="786384" y="5463579"/>
             <a:ext cx="5007711" cy="1005840"/>
           </a:xfrm>
           <a:prstGeom prst="rect">
@@ -5296,7 +5217,7 @@
                 <a:ea typeface="Pretendard"/>
                 <a:cs typeface="Pretendard"/>
               </a:rPr>
-              <a:t>가정한 값은 가림을 막혔다·안 막혔다 둘 중 하나로 본다. 조금 가려진 곳을 괜찮다고 넘기는데, 그런 곳이 곧 사각지대다. 평균이 아니라 나쁜 쪽에서 갈린다(0.17%p 대 88칸).</a:t>
+              <a:t>②는 가려짐을 막혔다·안 막혔다 둘 중 하나로 본다. 조금 가려진 곳을 괜찮다고 넘기는데, 그런 곳이 곧 사각지대다. 나쁜 쪽에서 갈린다(0.17%p 대 88칸).</a:t>
             </a:r>
           </a:p>
         </p:txBody>
@@ -5309,7 +5230,7 @@
         </p:nvSpPr>
         <p:spPr>
           <a:xfrm>
-            <a:off x="6525615" y="5332609"/>
+            <a:off x="6525615" y="5463579"/>
             <a:ext cx="5007711" cy="1005840"/>
           </a:xfrm>
           <a:prstGeom prst="rect">
@@ -5351,7 +5272,7 @@
                 <a:ea typeface="Pretendard"/>
                 <a:cs typeface="Pretendard"/>
               </a:rPr>
-              <a:t>사각지대로 치는 선을 0.4·0.5·0.6으로 바꿔도 제안 쪽이 늘 적다. 줄어드는 양은 각각 106·166·64칸이며, 0.6에서는 차이가 좁아진다. 가상 현장이라 숫자 자체가 아니라 세 배치의 순서를 주장한다.</a:t>
+              <a:t>사각지대로 치는 선을 0.4·0.5·0.6으로 바꿔도 ③이 늘 적다. 줄어드는 양은 각각 106·166·64칸이며, 0.6에서는 차이가 좁아진다. 가상 현장이라 숫자 자체가 아니라 셋의 순서를 주장한다.</a:t>
             </a:r>
           </a:p>
         </p:txBody>
@@ -5395,7 +5316,7 @@
                 <a:ea typeface="Pretendard"/>
                 <a:cs typeface="Pretendard"/>
               </a:rPr>
-              <a:t>현장 100×60 m · 카메라 자리 후보 24곳에서 8대 · 비교 대상인 기존 방식은 국제표준 네 등급을 다 돌려보고 기존 방식에 가장 유리한 등급으로 정했다 · 가정한 값은 국제표준의 두 지점(125·250 PPM)으로 고정 · 한 대씩 고르는 방식이지만 최적해의 63% 이상이 보장된다</a:t>
+              <a:t>현장 100×60 m 를 2 m 칸 1,256개로 나눴다 · 카메라 자리 후보 24곳에서 8대 · ①은 국제표준 네 등급을 다 돌려보고 ①에 가장 유리한 등급으로 정했다 · ②는 국제표준의 두 지점(125·250 PPM)으로 고정 · 한 대씩 고르는 방식이지만 최적해의 63% 이상이 보장된다</a:t>
             </a:r>
           </a:p>
         </p:txBody>
